--- a/Slide_Nhom1.pptx
+++ b/Slide_Nhom1.pptx
@@ -5,7 +5,7 @@
     <p:sldMasterId id="2147483648" r:id="rId1"/>
   </p:sldMasterIdLst>
   <p:notesMasterIdLst>
-    <p:notesMasterId r:id="rId20"/>
+    <p:notesMasterId r:id="rId25"/>
   </p:notesMasterIdLst>
   <p:sldIdLst>
     <p:sldId id="256" r:id="rId2"/>
@@ -26,6 +26,11 @@
     <p:sldId id="271" r:id="rId17"/>
     <p:sldId id="272" r:id="rId18"/>
     <p:sldId id="273" r:id="rId19"/>
+    <p:sldId id="274" r:id="rId20"/>
+    <p:sldId id="275" r:id="rId21"/>
+    <p:sldId id="276" r:id="rId22"/>
+    <p:sldId id="277" r:id="rId23"/>
+    <p:sldId id="278" r:id="rId24"/>
   </p:sldIdLst>
   <p:sldSz cx="9144000" cy="6858000" type="screen4x3"/>
   <p:notesSz cx="6858000" cy="9144000"/>
@@ -129,325 +134,6 @@
 </p:presentation>
 </file>
 
-<file path=ppt/ink/ink1.xml><?xml version="1.0" encoding="utf-8"?>
-<inkml:ink xmlns:inkml="http://www.w3.org/2003/InkML">
-  <inkml:definitions>
-    <inkml:context xml:id="ctx0">
-      <inkml:inkSource xml:id="inkSrc0">
-        <inkml:traceFormat>
-          <inkml:channel name="X" type="integer" min="-2.14748E9" max="2.14748E9" units="cm"/>
-          <inkml:channel name="Y" type="integer" min="-2.14748E9" max="2.14748E9" units="cm"/>
-        </inkml:traceFormat>
-        <inkml:channelProperties>
-          <inkml:channelProperty channel="X" name="resolution" value="1000" units="1/cm"/>
-          <inkml:channelProperty channel="Y" name="resolution" value="1000" units="1/cm"/>
-        </inkml:channelProperties>
-      </inkml:inkSource>
-      <inkml:timestamp xml:id="ts0" timeString="2026-04-06T10:09:42.873"/>
-    </inkml:context>
-    <inkml:brush xml:id="br0">
-      <inkml:brushProperty name="width" value="0.3" units="cm"/>
-      <inkml:brushProperty name="height" value="0.6" units="cm"/>
-      <inkml:brushProperty name="color" value="#FFFFFF"/>
-      <inkml:brushProperty name="tip" value="rectangle"/>
-      <inkml:brushProperty name="rasterOp" value="maskPen"/>
-      <inkml:brushProperty name="ignorePressure" value="1"/>
-    </inkml:brush>
-  </inkml:definitions>
-  <inkml:trace contextRef="#ctx0" brushRef="#br0">808 1,'80'7,"-27"-1,1139 30,-999-36,-186 0,32 0,-74 4,-796 90,-36 3,656-72,93-10,-171 2,268-20,51-1,1597-32,-1583 36</inkml:trace>
-</inkml:ink>
-</file>
-
-<file path=ppt/ink/ink10.xml><?xml version="1.0" encoding="utf-8"?>
-<inkml:ink xmlns:inkml="http://www.w3.org/2003/InkML">
-  <inkml:definitions>
-    <inkml:context xml:id="ctx0">
-      <inkml:inkSource xml:id="inkSrc0">
-        <inkml:traceFormat>
-          <inkml:channel name="X" type="integer" min="-2.14748E9" max="2.14748E9" units="cm"/>
-          <inkml:channel name="Y" type="integer" min="-2.14748E9" max="2.14748E9" units="cm"/>
-        </inkml:traceFormat>
-        <inkml:channelProperties>
-          <inkml:channelProperty channel="X" name="resolution" value="1000" units="1/cm"/>
-          <inkml:channelProperty channel="Y" name="resolution" value="1000" units="1/cm"/>
-        </inkml:channelProperties>
-      </inkml:inkSource>
-      <inkml:timestamp xml:id="ts0" timeString="2026-04-06T10:09:48.223"/>
-    </inkml:context>
-    <inkml:brush xml:id="br0">
-      <inkml:brushProperty name="width" value="0.3" units="cm"/>
-      <inkml:brushProperty name="height" value="0.6" units="cm"/>
-      <inkml:brushProperty name="color" value="#FFFFFF"/>
-      <inkml:brushProperty name="tip" value="rectangle"/>
-      <inkml:brushProperty name="rasterOp" value="maskPen"/>
-      <inkml:brushProperty name="ignorePressure" value="1"/>
-    </inkml:brush>
-  </inkml:definitions>
-  <inkml:trace contextRef="#ctx0" brushRef="#br0">1 0</inkml:trace>
-</inkml:ink>
-</file>
-
-<file path=ppt/ink/ink11.xml><?xml version="1.0" encoding="utf-8"?>
-<inkml:ink xmlns:inkml="http://www.w3.org/2003/InkML">
-  <inkml:definitions>
-    <inkml:context xml:id="ctx0">
-      <inkml:inkSource xml:id="inkSrc0">
-        <inkml:traceFormat>
-          <inkml:channel name="X" type="integer" min="-2.14748E9" max="2.14748E9" units="cm"/>
-          <inkml:channel name="Y" type="integer" min="-2.14748E9" max="2.14748E9" units="cm"/>
-        </inkml:traceFormat>
-        <inkml:channelProperties>
-          <inkml:channelProperty channel="X" name="resolution" value="1000" units="1/cm"/>
-          <inkml:channelProperty channel="Y" name="resolution" value="1000" units="1/cm"/>
-        </inkml:channelProperties>
-      </inkml:inkSource>
-      <inkml:timestamp xml:id="ts0" timeString="2026-04-06T10:09:50.140"/>
-    </inkml:context>
-    <inkml:brush xml:id="br0">
-      <inkml:brushProperty name="width" value="0.3" units="cm"/>
-      <inkml:brushProperty name="height" value="0.6" units="cm"/>
-      <inkml:brushProperty name="color" value="#FFFFFF"/>
-      <inkml:brushProperty name="tip" value="rectangle"/>
-      <inkml:brushProperty name="rasterOp" value="maskPen"/>
-      <inkml:brushProperty name="ignorePressure" value="1"/>
-    </inkml:brush>
-  </inkml:definitions>
-  <inkml:trace contextRef="#ctx0" brushRef="#br0">0 0,'0'0</inkml:trace>
-</inkml:ink>
-</file>
-
-<file path=ppt/ink/ink2.xml><?xml version="1.0" encoding="utf-8"?>
-<inkml:ink xmlns:inkml="http://www.w3.org/2003/InkML">
-  <inkml:definitions>
-    <inkml:context xml:id="ctx0">
-      <inkml:inkSource xml:id="inkSrc0">
-        <inkml:traceFormat>
-          <inkml:channel name="X" type="integer" min="-2.14748E9" max="2.14748E9" units="cm"/>
-          <inkml:channel name="Y" type="integer" min="-2.14748E9" max="2.14748E9" units="cm"/>
-        </inkml:traceFormat>
-        <inkml:channelProperties>
-          <inkml:channelProperty channel="X" name="resolution" value="1000" units="1/cm"/>
-          <inkml:channelProperty channel="Y" name="resolution" value="1000" units="1/cm"/>
-        </inkml:channelProperties>
-      </inkml:inkSource>
-      <inkml:timestamp xml:id="ts0" timeString="2026-04-06T10:09:43.372"/>
-    </inkml:context>
-    <inkml:brush xml:id="br0">
-      <inkml:brushProperty name="width" value="0.3" units="cm"/>
-      <inkml:brushProperty name="height" value="0.6" units="cm"/>
-      <inkml:brushProperty name="color" value="#FFFFFF"/>
-      <inkml:brushProperty name="tip" value="rectangle"/>
-      <inkml:brushProperty name="rasterOp" value="maskPen"/>
-      <inkml:brushProperty name="ignorePressure" value="1"/>
-    </inkml:brush>
-  </inkml:definitions>
-  <inkml:trace contextRef="#ctx0" brushRef="#br0">1 264,'12'0,"35"0,59 0,71-4,97-13,86-16,74-14,31-4,-20 4,-65 9,-97 11</inkml:trace>
-</inkml:ink>
-</file>
-
-<file path=ppt/ink/ink3.xml><?xml version="1.0" encoding="utf-8"?>
-<inkml:ink xmlns:inkml="http://www.w3.org/2003/InkML">
-  <inkml:definitions>
-    <inkml:context xml:id="ctx0">
-      <inkml:inkSource xml:id="inkSrc0">
-        <inkml:traceFormat>
-          <inkml:channel name="X" type="integer" min="-2.14748E9" max="2.14748E9" units="cm"/>
-          <inkml:channel name="Y" type="integer" min="-2.14748E9" max="2.14748E9" units="cm"/>
-        </inkml:traceFormat>
-        <inkml:channelProperties>
-          <inkml:channelProperty channel="X" name="resolution" value="1000" units="1/cm"/>
-          <inkml:channelProperty channel="Y" name="resolution" value="1000" units="1/cm"/>
-        </inkml:channelProperties>
-      </inkml:inkSource>
-      <inkml:timestamp xml:id="ts0" timeString="2026-04-06T10:09:43.914"/>
-    </inkml:context>
-    <inkml:brush xml:id="br0">
-      <inkml:brushProperty name="width" value="0.3" units="cm"/>
-      <inkml:brushProperty name="height" value="0.6" units="cm"/>
-      <inkml:brushProperty name="color" value="#FFFFFF"/>
-      <inkml:brushProperty name="tip" value="rectangle"/>
-      <inkml:brushProperty name="rasterOp" value="maskPen"/>
-      <inkml:brushProperty name="ignorePressure" value="1"/>
-    </inkml:brush>
-  </inkml:definitions>
-  <inkml:trace contextRef="#ctx0" brushRef="#br0">1 1,'0'4,"0"5,0 5,0 5,4 2,5 2,2 1,2 5,7 5,1 9,0 5,1-6,-4-6,-5-4,0-9,-3-8</inkml:trace>
-</inkml:ink>
-</file>
-
-<file path=ppt/ink/ink4.xml><?xml version="1.0" encoding="utf-8"?>
-<inkml:ink xmlns:inkml="http://www.w3.org/2003/InkML">
-  <inkml:definitions>
-    <inkml:context xml:id="ctx0">
-      <inkml:inkSource xml:id="inkSrc0">
-        <inkml:traceFormat>
-          <inkml:channel name="X" type="integer" min="-2.14748E9" max="2.14748E9" units="cm"/>
-          <inkml:channel name="Y" type="integer" min="-2.14748E9" max="2.14748E9" units="cm"/>
-        </inkml:traceFormat>
-        <inkml:channelProperties>
-          <inkml:channelProperty channel="X" name="resolution" value="1000" units="1/cm"/>
-          <inkml:channelProperty channel="Y" name="resolution" value="1000" units="1/cm"/>
-        </inkml:channelProperties>
-      </inkml:inkSource>
-      <inkml:timestamp xml:id="ts0" timeString="2026-04-06T10:09:44.862"/>
-    </inkml:context>
-    <inkml:brush xml:id="br0">
-      <inkml:brushProperty name="width" value="0.3" units="cm"/>
-      <inkml:brushProperty name="height" value="0.6" units="cm"/>
-      <inkml:brushProperty name="color" value="#FFFFFF"/>
-      <inkml:brushProperty name="tip" value="rectangle"/>
-      <inkml:brushProperty name="rasterOp" value="maskPen"/>
-      <inkml:brushProperty name="ignorePressure" value="1"/>
-    </inkml:brush>
-  </inkml:definitions>
-  <inkml:trace contextRef="#ctx0" brushRef="#br0">1 1,'2300'0,"-1947"12,-98-1,-202-10</inkml:trace>
-</inkml:ink>
-</file>
-
-<file path=ppt/ink/ink5.xml><?xml version="1.0" encoding="utf-8"?>
-<inkml:ink xmlns:inkml="http://www.w3.org/2003/InkML">
-  <inkml:definitions>
-    <inkml:context xml:id="ctx0">
-      <inkml:inkSource xml:id="inkSrc0">
-        <inkml:traceFormat>
-          <inkml:channel name="X" type="integer" min="-2.14748E9" max="2.14748E9" units="cm"/>
-          <inkml:channel name="Y" type="integer" min="-2.14748E9" max="2.14748E9" units="cm"/>
-        </inkml:traceFormat>
-        <inkml:channelProperties>
-          <inkml:channelProperty channel="X" name="resolution" value="1000" units="1/cm"/>
-          <inkml:channelProperty channel="Y" name="resolution" value="1000" units="1/cm"/>
-        </inkml:channelProperties>
-      </inkml:inkSource>
-      <inkml:timestamp xml:id="ts0" timeString="2026-04-06T10:09:46.124"/>
-    </inkml:context>
-    <inkml:brush xml:id="br0">
-      <inkml:brushProperty name="width" value="0.3" units="cm"/>
-      <inkml:brushProperty name="height" value="0.6" units="cm"/>
-      <inkml:brushProperty name="color" value="#FFFFFF"/>
-      <inkml:brushProperty name="tip" value="rectangle"/>
-      <inkml:brushProperty name="rasterOp" value="maskPen"/>
-      <inkml:brushProperty name="ignorePressure" value="1"/>
-    </inkml:brush>
-  </inkml:definitions>
-  <inkml:trace contextRef="#ctx0" brushRef="#br0">1093 847,'-66'0,"1"-2,0-3,-94-20,135 19,0 0,1-2,0-1,0-1,1-1,0-1,1-1,0 0,2-2,-1 0,2-2,-24-25,-62-90,-119-198,200 296,-41-72,42 71</inkml:trace>
-</inkml:ink>
-</file>
-
-<file path=ppt/ink/ink6.xml><?xml version="1.0" encoding="utf-8"?>
-<inkml:ink xmlns:inkml="http://www.w3.org/2003/InkML">
-  <inkml:definitions>
-    <inkml:context xml:id="ctx0">
-      <inkml:inkSource xml:id="inkSrc0">
-        <inkml:traceFormat>
-          <inkml:channel name="X" type="integer" min="-2.14748E9" max="2.14748E9" units="cm"/>
-          <inkml:channel name="Y" type="integer" min="-2.14748E9" max="2.14748E9" units="cm"/>
-        </inkml:traceFormat>
-        <inkml:channelProperties>
-          <inkml:channelProperty channel="X" name="resolution" value="1000" units="1/cm"/>
-          <inkml:channelProperty channel="Y" name="resolution" value="1000" units="1/cm"/>
-        </inkml:channelProperties>
-      </inkml:inkSource>
-      <inkml:timestamp xml:id="ts0" timeString="2026-04-06T10:09:47.058"/>
-    </inkml:context>
-    <inkml:brush xml:id="br0">
-      <inkml:brushProperty name="width" value="0.3" units="cm"/>
-      <inkml:brushProperty name="height" value="0.6" units="cm"/>
-      <inkml:brushProperty name="color" value="#FFFFFF"/>
-      <inkml:brushProperty name="tip" value="rectangle"/>
-      <inkml:brushProperty name="rasterOp" value="maskPen"/>
-      <inkml:brushProperty name="ignorePressure" value="1"/>
-    </inkml:brush>
-  </inkml:definitions>
-  <inkml:trace contextRef="#ctx0" brushRef="#br0">0 0,'91'8,"-39"0,4983 386,-4638-381,82-4,-416-7,-42 0,0-2,0 0,0-1,32-6,-51 6,-1 0,1 0,-1 1,1-1,-1 0,1-1,-1 1,0 0,0 0,0 0,0-1,0 1,0 0,0-1,0 1,1-4,7-9,0 6,0 0,0 0,1 1,0 1,0 0,1 0,0 1,0 0,11-3,18-3,52-9,-91 20,158-25,185-3,171 19,-384 8,2050 30,-1869-25,130 6,-293-1,-125-8</inkml:trace>
-</inkml:ink>
-</file>
-
-<file path=ppt/ink/ink7.xml><?xml version="1.0" encoding="utf-8"?>
-<inkml:ink xmlns:inkml="http://www.w3.org/2003/InkML">
-  <inkml:definitions>
-    <inkml:context xml:id="ctx0">
-      <inkml:inkSource xml:id="inkSrc0">
-        <inkml:traceFormat>
-          <inkml:channel name="X" type="integer" min="-2.14748E9" max="2.14748E9" units="cm"/>
-          <inkml:channel name="Y" type="integer" min="-2.14748E9" max="2.14748E9" units="cm"/>
-        </inkml:traceFormat>
-        <inkml:channelProperties>
-          <inkml:channelProperty channel="X" name="resolution" value="1000" units="1/cm"/>
-          <inkml:channelProperty channel="Y" name="resolution" value="1000" units="1/cm"/>
-        </inkml:channelProperties>
-      </inkml:inkSource>
-      <inkml:timestamp xml:id="ts0" timeString="2026-04-06T10:09:47.430"/>
-    </inkml:context>
-    <inkml:brush xml:id="br0">
-      <inkml:brushProperty name="width" value="0.3" units="cm"/>
-      <inkml:brushProperty name="height" value="0.6" units="cm"/>
-      <inkml:brushProperty name="color" value="#FFFFFF"/>
-      <inkml:brushProperty name="tip" value="rectangle"/>
-      <inkml:brushProperty name="rasterOp" value="maskPen"/>
-      <inkml:brushProperty name="ignorePressure" value="1"/>
-    </inkml:brush>
-  </inkml:definitions>
-  <inkml:trace contextRef="#ctx0" brushRef="#br0">0 1,'0'0</inkml:trace>
-</inkml:ink>
-</file>
-
-<file path=ppt/ink/ink8.xml><?xml version="1.0" encoding="utf-8"?>
-<inkml:ink xmlns:inkml="http://www.w3.org/2003/InkML">
-  <inkml:definitions>
-    <inkml:context xml:id="ctx0">
-      <inkml:inkSource xml:id="inkSrc0">
-        <inkml:traceFormat>
-          <inkml:channel name="X" type="integer" min="-2.14748E9" max="2.14748E9" units="cm"/>
-          <inkml:channel name="Y" type="integer" min="-2.14748E9" max="2.14748E9" units="cm"/>
-        </inkml:traceFormat>
-        <inkml:channelProperties>
-          <inkml:channelProperty channel="X" name="resolution" value="1000" units="1/cm"/>
-          <inkml:channelProperty channel="Y" name="resolution" value="1000" units="1/cm"/>
-        </inkml:channelProperties>
-      </inkml:inkSource>
-      <inkml:timestamp xml:id="ts0" timeString="2026-04-06T10:09:47.788"/>
-    </inkml:context>
-    <inkml:brush xml:id="br0">
-      <inkml:brushProperty name="width" value="0.3" units="cm"/>
-      <inkml:brushProperty name="height" value="0.6" units="cm"/>
-      <inkml:brushProperty name="color" value="#FFFFFF"/>
-      <inkml:brushProperty name="tip" value="rectangle"/>
-      <inkml:brushProperty name="rasterOp" value="maskPen"/>
-      <inkml:brushProperty name="ignorePressure" value="1"/>
-    </inkml:brush>
-  </inkml:definitions>
-  <inkml:trace contextRef="#ctx0" brushRef="#br0">0 0</inkml:trace>
-</inkml:ink>
-</file>
-
-<file path=ppt/ink/ink9.xml><?xml version="1.0" encoding="utf-8"?>
-<inkml:ink xmlns:inkml="http://www.w3.org/2003/InkML">
-  <inkml:definitions>
-    <inkml:context xml:id="ctx0">
-      <inkml:inkSource xml:id="inkSrc0">
-        <inkml:traceFormat>
-          <inkml:channel name="X" type="integer" min="-2.14748E9" max="2.14748E9" units="cm"/>
-          <inkml:channel name="Y" type="integer" min="-2.14748E9" max="2.14748E9" units="cm"/>
-        </inkml:traceFormat>
-        <inkml:channelProperties>
-          <inkml:channelProperty channel="X" name="resolution" value="1000" units="1/cm"/>
-          <inkml:channelProperty channel="Y" name="resolution" value="1000" units="1/cm"/>
-        </inkml:channelProperties>
-      </inkml:inkSource>
-      <inkml:timestamp xml:id="ts0" timeString="2026-04-06T10:09:48.006"/>
-    </inkml:context>
-    <inkml:brush xml:id="br0">
-      <inkml:brushProperty name="width" value="0.3" units="cm"/>
-      <inkml:brushProperty name="height" value="0.6" units="cm"/>
-      <inkml:brushProperty name="color" value="#FFFFFF"/>
-      <inkml:brushProperty name="tip" value="rectangle"/>
-      <inkml:brushProperty name="rasterOp" value="maskPen"/>
-      <inkml:brushProperty name="ignorePressure" value="1"/>
-    </inkml:brush>
-  </inkml:definitions>
-  <inkml:trace contextRef="#ctx0" brushRef="#br0">10 0,'-4'0,"-2"0</inkml:trace>
-</inkml:ink>
-</file>
-
 <file path=ppt/notesMasters/notesMaster1.xml><?xml version="1.0" encoding="utf-8"?>
 <p:notesMaster xmlns:a="http://schemas.openxmlformats.org/drawingml/2006/main" xmlns:r="http://schemas.openxmlformats.org/officeDocument/2006/relationships" xmlns:p="http://schemas.openxmlformats.org/presentationml/2006/main">
   <p:cSld>
@@ -473,7 +159,7 @@
     </p:spTree>
     <p:extLst>
       <p:ext uri="{BB962C8B-B14F-4D97-AF65-F5344CB8AC3E}">
-        <p14:creationId xmlns:p14="http://schemas.microsoft.com/office/powerpoint/2010/main" val="3498784998"/>
+        <p14:creationId xmlns:p14="http://schemas.microsoft.com/office/powerpoint/2010/main" val="2592375153"/>
       </p:ext>
     </p:extLst>
   </p:cSld>
@@ -617,11 +303,7 @@
           <a:bodyPr/>
           <a:lstStyle/>
           <a:p>
-            <a:r>
-              <a:rPr lang="en-US" dirty="0"/>
-              <a:t>[Sources]
-- User-provided PDF: Slide Báo cáo ABSA.pdf</a:t>
-            </a:r>
+            <a:endParaRPr lang="en-US" dirty="0"/>
           </a:p>
         </p:txBody>
       </p:sp>
@@ -705,11 +387,7 @@
           <a:bodyPr/>
           <a:lstStyle/>
           <a:p>
-            <a:r>
-              <a:rPr lang="en-US" dirty="0"/>
-              <a:t>[Sources]
-- User-provided PDF: Slide Báo cáo ABSA.pdf</a:t>
-            </a:r>
+            <a:endParaRPr lang="en-US" dirty="0"/>
           </a:p>
         </p:txBody>
       </p:sp>
@@ -793,11 +471,7 @@
           <a:bodyPr/>
           <a:lstStyle/>
           <a:p>
-            <a:r>
-              <a:rPr lang="en-US" dirty="0"/>
-              <a:t>[Sources]
-- User-provided PDF: Slide Báo cáo ABSA.pdf</a:t>
-            </a:r>
+            <a:endParaRPr lang="en-US" dirty="0"/>
           </a:p>
         </p:txBody>
       </p:sp>
@@ -881,11 +555,7 @@
           <a:bodyPr/>
           <a:lstStyle/>
           <a:p>
-            <a:r>
-              <a:rPr lang="en-US" dirty="0"/>
-              <a:t>[Sources]
-- User-provided PDF: Slide Báo cáo ABSA.pdf</a:t>
-            </a:r>
+            <a:endParaRPr lang="en-US" dirty="0"/>
           </a:p>
         </p:txBody>
       </p:sp>
@@ -969,11 +639,7 @@
           <a:bodyPr/>
           <a:lstStyle/>
           <a:p>
-            <a:r>
-              <a:rPr lang="en-US" dirty="0"/>
-              <a:t>[Sources]
-- User-provided PDF: Slide Báo cáo ABSA.pdf</a:t>
-            </a:r>
+            <a:endParaRPr lang="en-US" dirty="0"/>
           </a:p>
         </p:txBody>
       </p:sp>
@@ -1057,11 +723,7 @@
           <a:bodyPr/>
           <a:lstStyle/>
           <a:p>
-            <a:r>
-              <a:rPr lang="en-US" dirty="0"/>
-              <a:t>[Sources]
-- User-provided PDF: Slide Báo cáo ABSA.pdf</a:t>
-            </a:r>
+            <a:endParaRPr lang="en-US" dirty="0"/>
           </a:p>
         </p:txBody>
       </p:sp>
@@ -1145,11 +807,7 @@
           <a:bodyPr/>
           <a:lstStyle/>
           <a:p>
-            <a:r>
-              <a:rPr lang="en-US" dirty="0"/>
-              <a:t>[Sources]
-- User-provided PDF: Slide Báo cáo ABSA.pdf</a:t>
-            </a:r>
+            <a:endParaRPr lang="en-US" dirty="0"/>
           </a:p>
         </p:txBody>
       </p:sp>
@@ -1233,11 +891,7 @@
           <a:bodyPr/>
           <a:lstStyle/>
           <a:p>
-            <a:r>
-              <a:rPr lang="en-US" dirty="0"/>
-              <a:t>[Sources]
-- User-provided PDF: Slide Báo cáo ABSA.pdf</a:t>
-            </a:r>
+            <a:endParaRPr lang="en-US" dirty="0"/>
           </a:p>
         </p:txBody>
       </p:sp>
@@ -1321,11 +975,7 @@
           <a:bodyPr/>
           <a:lstStyle/>
           <a:p>
-            <a:r>
-              <a:rPr lang="en-US" dirty="0"/>
-              <a:t>[Sources]
-- User-provided PDF: Slide Báo cáo ABSA.pdf</a:t>
-            </a:r>
+            <a:endParaRPr lang="en-US" dirty="0"/>
           </a:p>
         </p:txBody>
       </p:sp>
@@ -1409,11 +1059,7 @@
           <a:bodyPr/>
           <a:lstStyle/>
           <a:p>
-            <a:r>
-              <a:rPr lang="en-US" dirty="0"/>
-              <a:t>[Sources]
-- User-provided PDF: Slide Báo cáo ABSA.pdf</a:t>
-            </a:r>
+            <a:endParaRPr lang="en-US" dirty="0"/>
           </a:p>
         </p:txBody>
       </p:sp>
@@ -1453,6 +1099,90 @@
 </p:notes>
 </file>
 
+<file path=ppt/notesSlides/notesSlide19.xml><?xml version="1.0" encoding="utf-8"?>
+<p:notes xmlns:a="http://schemas.openxmlformats.org/drawingml/2006/main" xmlns:r="http://schemas.openxmlformats.org/officeDocument/2006/relationships" xmlns:p="http://schemas.openxmlformats.org/presentationml/2006/main">
+  <p:cSld>
+    <p:spTree>
+      <p:nvGrpSpPr>
+        <p:cNvPr id="1" name=""/>
+        <p:cNvGrpSpPr/>
+        <p:nvPr/>
+      </p:nvGrpSpPr>
+      <p:grpSpPr>
+        <a:xfrm>
+          <a:off x="0" y="0"/>
+          <a:ext cx="0" cy="0"/>
+          <a:chOff x="0" y="0"/>
+          <a:chExt cx="0" cy="0"/>
+        </a:xfrm>
+      </p:grpSpPr>
+      <p:sp>
+        <p:nvSpPr>
+          <p:cNvPr id="2" name="Slide Image Placeholder 1"/>
+          <p:cNvSpPr>
+            <a:spLocks noGrp="1" noRot="1" noChangeAspect="1"/>
+          </p:cNvSpPr>
+          <p:nvPr>
+            <p:ph type="sldImg"/>
+          </p:nvPr>
+        </p:nvSpPr>
+        <p:spPr/>
+      </p:sp>
+      <p:sp>
+        <p:nvSpPr>
+          <p:cNvPr id="3" name="Notes Placeholder 2"/>
+          <p:cNvSpPr>
+            <a:spLocks noGrp="1"/>
+          </p:cNvSpPr>
+          <p:nvPr>
+            <p:ph type="body" idx="1"/>
+          </p:nvPr>
+        </p:nvSpPr>
+        <p:spPr/>
+        <p:txBody>
+          <a:bodyPr/>
+          <a:lstStyle/>
+          <a:p>
+            <a:endParaRPr lang="en-US" dirty="0"/>
+          </a:p>
+        </p:txBody>
+      </p:sp>
+      <p:sp>
+        <p:nvSpPr>
+          <p:cNvPr id="4" name="Slide Number Placeholder 3"/>
+          <p:cNvSpPr>
+            <a:spLocks noGrp="1"/>
+          </p:cNvSpPr>
+          <p:nvPr>
+            <p:ph type="sldNum" sz="quarter" idx="10"/>
+          </p:nvPr>
+        </p:nvSpPr>
+        <p:spPr/>
+        <p:txBody>
+          <a:bodyPr/>
+          <a:lstStyle/>
+          <a:p>
+            <a:fld id="{F7021451-1387-4CA6-816F-3879F97B5CBC}" type="slidenum">
+              <a:rPr lang="en-US"/>
+              <a:t>19</a:t>
+            </a:fld>
+            <a:endParaRPr lang="en-US"/>
+          </a:p>
+        </p:txBody>
+      </p:sp>
+    </p:spTree>
+    <p:extLst>
+      <p:ext uri="{BB962C8B-B14F-4D97-AF65-F5344CB8AC3E}">
+        <p14:creationId xmlns:p14="http://schemas.microsoft.com/office/powerpoint/2010/main" val="1024086991"/>
+      </p:ext>
+    </p:extLst>
+  </p:cSld>
+  <p:clrMapOvr>
+    <a:masterClrMapping/>
+  </p:clrMapOvr>
+</p:notes>
+</file>
+
 <file path=ppt/notesSlides/notesSlide2.xml><?xml version="1.0" encoding="utf-8"?>
 <p:notes xmlns:a="http://schemas.openxmlformats.org/drawingml/2006/main" xmlns:r="http://schemas.openxmlformats.org/officeDocument/2006/relationships" xmlns:p="http://schemas.openxmlformats.org/presentationml/2006/main">
   <p:cSld>
@@ -1497,11 +1227,7 @@
           <a:bodyPr/>
           <a:lstStyle/>
           <a:p>
-            <a:r>
-              <a:rPr lang="en-US" dirty="0"/>
-              <a:t>[Sources]
-- User-provided PDF: Slide Báo cáo ABSA.pdf</a:t>
-            </a:r>
+            <a:endParaRPr lang="en-US" dirty="0"/>
           </a:p>
         </p:txBody>
       </p:sp>
@@ -1541,6 +1267,342 @@
 </p:notes>
 </file>
 
+<file path=ppt/notesSlides/notesSlide20.xml><?xml version="1.0" encoding="utf-8"?>
+<p:notes xmlns:a="http://schemas.openxmlformats.org/drawingml/2006/main" xmlns:r="http://schemas.openxmlformats.org/officeDocument/2006/relationships" xmlns:p="http://schemas.openxmlformats.org/presentationml/2006/main">
+  <p:cSld>
+    <p:spTree>
+      <p:nvGrpSpPr>
+        <p:cNvPr id="1" name=""/>
+        <p:cNvGrpSpPr/>
+        <p:nvPr/>
+      </p:nvGrpSpPr>
+      <p:grpSpPr>
+        <a:xfrm>
+          <a:off x="0" y="0"/>
+          <a:ext cx="0" cy="0"/>
+          <a:chOff x="0" y="0"/>
+          <a:chExt cx="0" cy="0"/>
+        </a:xfrm>
+      </p:grpSpPr>
+      <p:sp>
+        <p:nvSpPr>
+          <p:cNvPr id="2" name="Slide Image Placeholder 1"/>
+          <p:cNvSpPr>
+            <a:spLocks noGrp="1" noRot="1" noChangeAspect="1"/>
+          </p:cNvSpPr>
+          <p:nvPr>
+            <p:ph type="sldImg"/>
+          </p:nvPr>
+        </p:nvSpPr>
+        <p:spPr/>
+      </p:sp>
+      <p:sp>
+        <p:nvSpPr>
+          <p:cNvPr id="3" name="Notes Placeholder 2"/>
+          <p:cNvSpPr>
+            <a:spLocks noGrp="1"/>
+          </p:cNvSpPr>
+          <p:nvPr>
+            <p:ph type="body" idx="1"/>
+          </p:nvPr>
+        </p:nvSpPr>
+        <p:spPr/>
+        <p:txBody>
+          <a:bodyPr/>
+          <a:lstStyle/>
+          <a:p>
+            <a:endParaRPr lang="en-US" dirty="0"/>
+          </a:p>
+        </p:txBody>
+      </p:sp>
+      <p:sp>
+        <p:nvSpPr>
+          <p:cNvPr id="4" name="Slide Number Placeholder 3"/>
+          <p:cNvSpPr>
+            <a:spLocks noGrp="1"/>
+          </p:cNvSpPr>
+          <p:nvPr>
+            <p:ph type="sldNum" sz="quarter" idx="10"/>
+          </p:nvPr>
+        </p:nvSpPr>
+        <p:spPr/>
+        <p:txBody>
+          <a:bodyPr/>
+          <a:lstStyle/>
+          <a:p>
+            <a:fld id="{F7021451-1387-4CA6-816F-3879F97B5CBC}" type="slidenum">
+              <a:rPr lang="en-US"/>
+              <a:t>20</a:t>
+            </a:fld>
+            <a:endParaRPr lang="en-US"/>
+          </a:p>
+        </p:txBody>
+      </p:sp>
+    </p:spTree>
+    <p:extLst>
+      <p:ext uri="{BB962C8B-B14F-4D97-AF65-F5344CB8AC3E}">
+        <p14:creationId xmlns:p14="http://schemas.microsoft.com/office/powerpoint/2010/main" val="1024086991"/>
+      </p:ext>
+    </p:extLst>
+  </p:cSld>
+  <p:clrMapOvr>
+    <a:masterClrMapping/>
+  </p:clrMapOvr>
+</p:notes>
+</file>
+
+<file path=ppt/notesSlides/notesSlide21.xml><?xml version="1.0" encoding="utf-8"?>
+<p:notes xmlns:a="http://schemas.openxmlformats.org/drawingml/2006/main" xmlns:r="http://schemas.openxmlformats.org/officeDocument/2006/relationships" xmlns:p="http://schemas.openxmlformats.org/presentationml/2006/main">
+  <p:cSld>
+    <p:spTree>
+      <p:nvGrpSpPr>
+        <p:cNvPr id="1" name=""/>
+        <p:cNvGrpSpPr/>
+        <p:nvPr/>
+      </p:nvGrpSpPr>
+      <p:grpSpPr>
+        <a:xfrm>
+          <a:off x="0" y="0"/>
+          <a:ext cx="0" cy="0"/>
+          <a:chOff x="0" y="0"/>
+          <a:chExt cx="0" cy="0"/>
+        </a:xfrm>
+      </p:grpSpPr>
+      <p:sp>
+        <p:nvSpPr>
+          <p:cNvPr id="2" name="Slide Image Placeholder 1"/>
+          <p:cNvSpPr>
+            <a:spLocks noGrp="1" noRot="1" noChangeAspect="1"/>
+          </p:cNvSpPr>
+          <p:nvPr>
+            <p:ph type="sldImg"/>
+          </p:nvPr>
+        </p:nvSpPr>
+        <p:spPr/>
+      </p:sp>
+      <p:sp>
+        <p:nvSpPr>
+          <p:cNvPr id="3" name="Notes Placeholder 2"/>
+          <p:cNvSpPr>
+            <a:spLocks noGrp="1"/>
+          </p:cNvSpPr>
+          <p:nvPr>
+            <p:ph type="body" idx="1"/>
+          </p:nvPr>
+        </p:nvSpPr>
+        <p:spPr/>
+        <p:txBody>
+          <a:bodyPr/>
+          <a:lstStyle/>
+          <a:p>
+            <a:endParaRPr lang="en-US" dirty="0"/>
+          </a:p>
+        </p:txBody>
+      </p:sp>
+      <p:sp>
+        <p:nvSpPr>
+          <p:cNvPr id="4" name="Slide Number Placeholder 3"/>
+          <p:cNvSpPr>
+            <a:spLocks noGrp="1"/>
+          </p:cNvSpPr>
+          <p:nvPr>
+            <p:ph type="sldNum" sz="quarter" idx="10"/>
+          </p:nvPr>
+        </p:nvSpPr>
+        <p:spPr/>
+        <p:txBody>
+          <a:bodyPr/>
+          <a:lstStyle/>
+          <a:p>
+            <a:fld id="{F7021451-1387-4CA6-816F-3879F97B5CBC}" type="slidenum">
+              <a:rPr lang="en-US"/>
+              <a:t>21</a:t>
+            </a:fld>
+            <a:endParaRPr lang="en-US"/>
+          </a:p>
+        </p:txBody>
+      </p:sp>
+    </p:spTree>
+    <p:extLst>
+      <p:ext uri="{BB962C8B-B14F-4D97-AF65-F5344CB8AC3E}">
+        <p14:creationId xmlns:p14="http://schemas.microsoft.com/office/powerpoint/2010/main" val="1024086991"/>
+      </p:ext>
+    </p:extLst>
+  </p:cSld>
+  <p:clrMapOvr>
+    <a:masterClrMapping/>
+  </p:clrMapOvr>
+</p:notes>
+</file>
+
+<file path=ppt/notesSlides/notesSlide22.xml><?xml version="1.0" encoding="utf-8"?>
+<p:notes xmlns:a="http://schemas.openxmlformats.org/drawingml/2006/main" xmlns:r="http://schemas.openxmlformats.org/officeDocument/2006/relationships" xmlns:p="http://schemas.openxmlformats.org/presentationml/2006/main">
+  <p:cSld>
+    <p:spTree>
+      <p:nvGrpSpPr>
+        <p:cNvPr id="1" name=""/>
+        <p:cNvGrpSpPr/>
+        <p:nvPr/>
+      </p:nvGrpSpPr>
+      <p:grpSpPr>
+        <a:xfrm>
+          <a:off x="0" y="0"/>
+          <a:ext cx="0" cy="0"/>
+          <a:chOff x="0" y="0"/>
+          <a:chExt cx="0" cy="0"/>
+        </a:xfrm>
+      </p:grpSpPr>
+      <p:sp>
+        <p:nvSpPr>
+          <p:cNvPr id="2" name="Slide Image Placeholder 1"/>
+          <p:cNvSpPr>
+            <a:spLocks noGrp="1" noRot="1" noChangeAspect="1"/>
+          </p:cNvSpPr>
+          <p:nvPr>
+            <p:ph type="sldImg"/>
+          </p:nvPr>
+        </p:nvSpPr>
+        <p:spPr/>
+      </p:sp>
+      <p:sp>
+        <p:nvSpPr>
+          <p:cNvPr id="3" name="Notes Placeholder 2"/>
+          <p:cNvSpPr>
+            <a:spLocks noGrp="1"/>
+          </p:cNvSpPr>
+          <p:nvPr>
+            <p:ph type="body" idx="1"/>
+          </p:nvPr>
+        </p:nvSpPr>
+        <p:spPr/>
+        <p:txBody>
+          <a:bodyPr/>
+          <a:lstStyle/>
+          <a:p>
+            <a:endParaRPr lang="en-US" dirty="0"/>
+          </a:p>
+        </p:txBody>
+      </p:sp>
+      <p:sp>
+        <p:nvSpPr>
+          <p:cNvPr id="4" name="Slide Number Placeholder 3"/>
+          <p:cNvSpPr>
+            <a:spLocks noGrp="1"/>
+          </p:cNvSpPr>
+          <p:nvPr>
+            <p:ph type="sldNum" sz="quarter" idx="10"/>
+          </p:nvPr>
+        </p:nvSpPr>
+        <p:spPr/>
+        <p:txBody>
+          <a:bodyPr/>
+          <a:lstStyle/>
+          <a:p>
+            <a:fld id="{F7021451-1387-4CA6-816F-3879F97B5CBC}" type="slidenum">
+              <a:rPr lang="en-US"/>
+              <a:t>22</a:t>
+            </a:fld>
+            <a:endParaRPr lang="en-US"/>
+          </a:p>
+        </p:txBody>
+      </p:sp>
+    </p:spTree>
+    <p:extLst>
+      <p:ext uri="{BB962C8B-B14F-4D97-AF65-F5344CB8AC3E}">
+        <p14:creationId xmlns:p14="http://schemas.microsoft.com/office/powerpoint/2010/main" val="1024086991"/>
+      </p:ext>
+    </p:extLst>
+  </p:cSld>
+  <p:clrMapOvr>
+    <a:masterClrMapping/>
+  </p:clrMapOvr>
+</p:notes>
+</file>
+
+<file path=ppt/notesSlides/notesSlide23.xml><?xml version="1.0" encoding="utf-8"?>
+<p:notes xmlns:a="http://schemas.openxmlformats.org/drawingml/2006/main" xmlns:r="http://schemas.openxmlformats.org/officeDocument/2006/relationships" xmlns:p="http://schemas.openxmlformats.org/presentationml/2006/main">
+  <p:cSld>
+    <p:spTree>
+      <p:nvGrpSpPr>
+        <p:cNvPr id="1" name=""/>
+        <p:cNvGrpSpPr/>
+        <p:nvPr/>
+      </p:nvGrpSpPr>
+      <p:grpSpPr>
+        <a:xfrm>
+          <a:off x="0" y="0"/>
+          <a:ext cx="0" cy="0"/>
+          <a:chOff x="0" y="0"/>
+          <a:chExt cx="0" cy="0"/>
+        </a:xfrm>
+      </p:grpSpPr>
+      <p:sp>
+        <p:nvSpPr>
+          <p:cNvPr id="2" name="Slide Image Placeholder 1"/>
+          <p:cNvSpPr>
+            <a:spLocks noGrp="1" noRot="1" noChangeAspect="1"/>
+          </p:cNvSpPr>
+          <p:nvPr>
+            <p:ph type="sldImg"/>
+          </p:nvPr>
+        </p:nvSpPr>
+        <p:spPr/>
+      </p:sp>
+      <p:sp>
+        <p:nvSpPr>
+          <p:cNvPr id="3" name="Notes Placeholder 2"/>
+          <p:cNvSpPr>
+            <a:spLocks noGrp="1"/>
+          </p:cNvSpPr>
+          <p:nvPr>
+            <p:ph type="body" idx="1"/>
+          </p:nvPr>
+        </p:nvSpPr>
+        <p:spPr/>
+        <p:txBody>
+          <a:bodyPr/>
+          <a:lstStyle/>
+          <a:p>
+            <a:endParaRPr lang="en-US" dirty="0"/>
+          </a:p>
+        </p:txBody>
+      </p:sp>
+      <p:sp>
+        <p:nvSpPr>
+          <p:cNvPr id="4" name="Slide Number Placeholder 3"/>
+          <p:cNvSpPr>
+            <a:spLocks noGrp="1"/>
+          </p:cNvSpPr>
+          <p:nvPr>
+            <p:ph type="sldNum" sz="quarter" idx="10"/>
+          </p:nvPr>
+        </p:nvSpPr>
+        <p:spPr/>
+        <p:txBody>
+          <a:bodyPr/>
+          <a:lstStyle/>
+          <a:p>
+            <a:fld id="{F7021451-1387-4CA6-816F-3879F97B5CBC}" type="slidenum">
+              <a:rPr lang="en-US"/>
+              <a:t>23</a:t>
+            </a:fld>
+            <a:endParaRPr lang="en-US"/>
+          </a:p>
+        </p:txBody>
+      </p:sp>
+    </p:spTree>
+    <p:extLst>
+      <p:ext uri="{BB962C8B-B14F-4D97-AF65-F5344CB8AC3E}">
+        <p14:creationId xmlns:p14="http://schemas.microsoft.com/office/powerpoint/2010/main" val="1024086991"/>
+      </p:ext>
+    </p:extLst>
+  </p:cSld>
+  <p:clrMapOvr>
+    <a:masterClrMapping/>
+  </p:clrMapOvr>
+</p:notes>
+</file>
+
 <file path=ppt/notesSlides/notesSlide3.xml><?xml version="1.0" encoding="utf-8"?>
 <p:notes xmlns:a="http://schemas.openxmlformats.org/drawingml/2006/main" xmlns:r="http://schemas.openxmlformats.org/officeDocument/2006/relationships" xmlns:p="http://schemas.openxmlformats.org/presentationml/2006/main">
   <p:cSld>
@@ -1585,11 +1647,7 @@
           <a:bodyPr/>
           <a:lstStyle/>
           <a:p>
-            <a:r>
-              <a:rPr lang="en-US" dirty="0"/>
-              <a:t>[Sources]
-- User-provided PDF: Slide Báo cáo ABSA.pdf</a:t>
-            </a:r>
+            <a:endParaRPr lang="en-US" dirty="0"/>
           </a:p>
         </p:txBody>
       </p:sp>
@@ -1673,11 +1731,7 @@
           <a:bodyPr/>
           <a:lstStyle/>
           <a:p>
-            <a:r>
-              <a:rPr lang="en-US" dirty="0"/>
-              <a:t>[Sources]
-- User-provided PDF: Slide Báo cáo ABSA.pdf</a:t>
-            </a:r>
+            <a:endParaRPr lang="en-US" dirty="0"/>
           </a:p>
         </p:txBody>
       </p:sp>
@@ -1761,11 +1815,7 @@
           <a:bodyPr/>
           <a:lstStyle/>
           <a:p>
-            <a:r>
-              <a:rPr lang="en-US" dirty="0"/>
-              <a:t>[Sources]
-- User-provided PDF: Slide Báo cáo ABSA.pdf</a:t>
-            </a:r>
+            <a:endParaRPr lang="en-US" dirty="0"/>
           </a:p>
         </p:txBody>
       </p:sp>
@@ -1849,11 +1899,7 @@
           <a:bodyPr/>
           <a:lstStyle/>
           <a:p>
-            <a:r>
-              <a:rPr lang="en-US" dirty="0"/>
-              <a:t>[Sources]
-- User-provided PDF: Slide Báo cáo ABSA.pdf</a:t>
-            </a:r>
+            <a:endParaRPr lang="en-US" dirty="0"/>
           </a:p>
         </p:txBody>
       </p:sp>
@@ -1937,11 +1983,7 @@
           <a:bodyPr/>
           <a:lstStyle/>
           <a:p>
-            <a:r>
-              <a:rPr lang="en-US" dirty="0"/>
-              <a:t>[Sources]
-- User-provided PDF: Slide Báo cáo ABSA.pdf</a:t>
-            </a:r>
+            <a:endParaRPr lang="en-US" dirty="0"/>
           </a:p>
         </p:txBody>
       </p:sp>
@@ -2025,11 +2067,7 @@
           <a:bodyPr/>
           <a:lstStyle/>
           <a:p>
-            <a:r>
-              <a:rPr lang="en-US" dirty="0"/>
-              <a:t>[Sources]
-- User-provided PDF: Slide Báo cáo ABSA.pdf</a:t>
-            </a:r>
+            <a:endParaRPr lang="en-US" dirty="0"/>
           </a:p>
         </p:txBody>
       </p:sp>
@@ -2113,11 +2151,7 @@
           <a:bodyPr/>
           <a:lstStyle/>
           <a:p>
-            <a:r>
-              <a:rPr lang="en-US" dirty="0"/>
-              <a:t>[Sources]
-- User-provided PDF: Slide Báo cáo ABSA.pdf</a:t>
-            </a:r>
+            <a:endParaRPr lang="en-US" dirty="0"/>
           </a:p>
         </p:txBody>
       </p:sp>
@@ -2187,6 +2221,39 @@
 </p:sldLayout>
 </file>
 
+<file path=ppt/slideLayouts/slideLayout2.xml><?xml version="1.0" encoding="utf-8"?>
+<p:sldLayout xmlns:a="http://schemas.openxmlformats.org/drawingml/2006/main" xmlns:r="http://schemas.openxmlformats.org/officeDocument/2006/relationships" xmlns:p="http://schemas.openxmlformats.org/presentationml/2006/main" preserve="1">
+  <p:cSld name="BASE">
+    <p:bg>
+      <p:bgPr>
+        <a:solidFill>
+          <a:srgbClr val="FFFFFF"/>
+        </a:solidFill>
+        <a:effectLst/>
+      </p:bgPr>
+    </p:bg>
+    <p:spTree>
+      <p:nvGrpSpPr>
+        <p:cNvPr id="1" name=""/>
+        <p:cNvGrpSpPr/>
+        <p:nvPr/>
+      </p:nvGrpSpPr>
+      <p:grpSpPr>
+        <a:xfrm>
+          <a:off x="0" y="0"/>
+          <a:ext cx="0" cy="0"/>
+          <a:chOff x="0" y="0"/>
+          <a:chExt cx="0" cy="0"/>
+        </a:xfrm>
+      </p:grpSpPr>
+    </p:spTree>
+  </p:cSld>
+  <p:clrMapOvr>
+    <a:masterClrMapping/>
+  </p:clrMapOvr>
+</p:sldLayout>
+</file>
+
 <file path=ppt/slideMasters/slideMaster1.xml><?xml version="1.0" encoding="utf-8"?>
 <p:sldMaster xmlns:a="http://schemas.openxmlformats.org/drawingml/2006/main" xmlns:r="http://schemas.openxmlformats.org/officeDocument/2006/relationships" xmlns:p="http://schemas.openxmlformats.org/presentationml/2006/main">
   <p:cSld>
@@ -2214,6 +2281,7 @@
   <p:clrMap bg1="lt1" tx1="dk1" bg2="lt2" tx2="dk2" accent1="accent1" accent2="accent2" accent3="accent3" accent4="accent4" accent5="accent5" accent6="accent6" hlink="hlink" folHlink="folHlink"/>
   <p:sldLayoutIdLst>
     <p:sldLayoutId id="2147483649" r:id="rId1"/>
+    <p:sldLayoutId id="2147483650" r:id="rId2"/>
   </p:sldLayoutIdLst>
   <p:hf sldNum="0" hdr="0" ftr="0" dt="0"/>
   <p:txStyles>
@@ -2472,14 +2540,6 @@
 <file path=ppt/slides/slide1.xml><?xml version="1.0" encoding="utf-8"?>
 <p:sld xmlns:a="http://schemas.openxmlformats.org/drawingml/2006/main" xmlns:r="http://schemas.openxmlformats.org/officeDocument/2006/relationships" xmlns:p="http://schemas.openxmlformats.org/presentationml/2006/main">
   <p:cSld name="Slide 1">
-    <p:bg>
-      <p:bgPr>
-        <a:solidFill>
-          <a:srgbClr val="FFFFFF"/>
-        </a:solidFill>
-        <a:effectLst/>
-      </p:bgPr>
-    </p:bg>
     <p:spTree>
       <p:nvGrpSpPr>
         <p:cNvPr id="1" name=""/>
@@ -2496,7 +2556,7 @@
       </p:grpSpPr>
       <p:pic>
         <p:nvPicPr>
-          <p:cNvPr id="2" name="Image 0" descr="/mnt/data/absa_pdf18_render/slide-01.png"/>
+          <p:cNvPr id="2" name="Image 0" descr="/mnt/data/absa_pdf_renders/page-01.png"/>
           <p:cNvPicPr>
             <a:picLocks noChangeAspect="1"/>
           </p:cNvPicPr>
@@ -2529,14 +2589,6 @@
 <file path=ppt/slides/slide10.xml><?xml version="1.0" encoding="utf-8"?>
 <p:sld xmlns:a="http://schemas.openxmlformats.org/drawingml/2006/main" xmlns:r="http://schemas.openxmlformats.org/officeDocument/2006/relationships" xmlns:p="http://schemas.openxmlformats.org/presentationml/2006/main">
   <p:cSld name="Slide 10">
-    <p:bg>
-      <p:bgPr>
-        <a:solidFill>
-          <a:srgbClr val="FFFFFF"/>
-        </a:solidFill>
-        <a:effectLst/>
-      </p:bgPr>
-    </p:bg>
     <p:spTree>
       <p:nvGrpSpPr>
         <p:cNvPr id="1" name=""/>
@@ -2553,7 +2605,7 @@
       </p:grpSpPr>
       <p:pic>
         <p:nvPicPr>
-          <p:cNvPr id="2" name="Image 0" descr="/mnt/data/absa_pdf18_render/slide-10.png"/>
+          <p:cNvPr id="2" name="Image 0" descr="/mnt/data/absa_pdf_renders/page-10.png"/>
           <p:cNvPicPr>
             <a:picLocks noChangeAspect="1"/>
           </p:cNvPicPr>
@@ -2586,14 +2638,6 @@
 <file path=ppt/slides/slide11.xml><?xml version="1.0" encoding="utf-8"?>
 <p:sld xmlns:a="http://schemas.openxmlformats.org/drawingml/2006/main" xmlns:r="http://schemas.openxmlformats.org/officeDocument/2006/relationships" xmlns:p="http://schemas.openxmlformats.org/presentationml/2006/main">
   <p:cSld name="Slide 11">
-    <p:bg>
-      <p:bgPr>
-        <a:solidFill>
-          <a:srgbClr val="FFFFFF"/>
-        </a:solidFill>
-        <a:effectLst/>
-      </p:bgPr>
-    </p:bg>
     <p:spTree>
       <p:nvGrpSpPr>
         <p:cNvPr id="1" name=""/>
@@ -2610,7 +2654,7 @@
       </p:grpSpPr>
       <p:pic>
         <p:nvPicPr>
-          <p:cNvPr id="2" name="Image 0" descr="/mnt/data/absa_pdf18_render/slide-11.png"/>
+          <p:cNvPr id="2" name="Image 0" descr="/mnt/data/absa_pdf_renders/page-11.png"/>
           <p:cNvPicPr>
             <a:picLocks noChangeAspect="1"/>
           </p:cNvPicPr>
@@ -2643,14 +2687,6 @@
 <file path=ppt/slides/slide12.xml><?xml version="1.0" encoding="utf-8"?>
 <p:sld xmlns:a="http://schemas.openxmlformats.org/drawingml/2006/main" xmlns:r="http://schemas.openxmlformats.org/officeDocument/2006/relationships" xmlns:p="http://schemas.openxmlformats.org/presentationml/2006/main">
   <p:cSld name="Slide 12">
-    <p:bg>
-      <p:bgPr>
-        <a:solidFill>
-          <a:srgbClr val="FFFFFF"/>
-        </a:solidFill>
-        <a:effectLst/>
-      </p:bgPr>
-    </p:bg>
     <p:spTree>
       <p:nvGrpSpPr>
         <p:cNvPr id="1" name=""/>
@@ -2667,7 +2703,7 @@
       </p:grpSpPr>
       <p:pic>
         <p:nvPicPr>
-          <p:cNvPr id="2" name="Image 0" descr="/mnt/data/absa_pdf18_render/slide-12.png"/>
+          <p:cNvPr id="2" name="Image 0" descr="/mnt/data/absa_pdf_renders/page-12.png"/>
           <p:cNvPicPr>
             <a:picLocks noChangeAspect="1"/>
           </p:cNvPicPr>
@@ -2700,14 +2736,6 @@
 <file path=ppt/slides/slide13.xml><?xml version="1.0" encoding="utf-8"?>
 <p:sld xmlns:a="http://schemas.openxmlformats.org/drawingml/2006/main" xmlns:r="http://schemas.openxmlformats.org/officeDocument/2006/relationships" xmlns:p="http://schemas.openxmlformats.org/presentationml/2006/main">
   <p:cSld name="Slide 13">
-    <p:bg>
-      <p:bgPr>
-        <a:solidFill>
-          <a:srgbClr val="FFFFFF"/>
-        </a:solidFill>
-        <a:effectLst/>
-      </p:bgPr>
-    </p:bg>
     <p:spTree>
       <p:nvGrpSpPr>
         <p:cNvPr id="1" name=""/>
@@ -2724,7 +2752,7 @@
       </p:grpSpPr>
       <p:pic>
         <p:nvPicPr>
-          <p:cNvPr id="2" name="Image 0" descr="/mnt/data/absa_pdf18_render/slide-13.png"/>
+          <p:cNvPr id="2" name="Image 0" descr="/mnt/data/absa_pdf_renders/page-13.png"/>
           <p:cNvPicPr>
             <a:picLocks noChangeAspect="1"/>
           </p:cNvPicPr>
@@ -2757,14 +2785,6 @@
 <file path=ppt/slides/slide14.xml><?xml version="1.0" encoding="utf-8"?>
 <p:sld xmlns:a="http://schemas.openxmlformats.org/drawingml/2006/main" xmlns:r="http://schemas.openxmlformats.org/officeDocument/2006/relationships" xmlns:p="http://schemas.openxmlformats.org/presentationml/2006/main">
   <p:cSld name="Slide 14">
-    <p:bg>
-      <p:bgPr>
-        <a:solidFill>
-          <a:srgbClr val="FFFFFF"/>
-        </a:solidFill>
-        <a:effectLst/>
-      </p:bgPr>
-    </p:bg>
     <p:spTree>
       <p:nvGrpSpPr>
         <p:cNvPr id="1" name=""/>
@@ -2781,7 +2801,7 @@
       </p:grpSpPr>
       <p:pic>
         <p:nvPicPr>
-          <p:cNvPr id="2" name="Image 0" descr="/mnt/data/absa_pdf18_render/slide-14.png"/>
+          <p:cNvPr id="2" name="Image 0" descr="/mnt/data/absa_pdf_renders/page-14.png"/>
           <p:cNvPicPr>
             <a:picLocks noChangeAspect="1"/>
           </p:cNvPicPr>
@@ -2814,14 +2834,6 @@
 <file path=ppt/slides/slide15.xml><?xml version="1.0" encoding="utf-8"?>
 <p:sld xmlns:a="http://schemas.openxmlformats.org/drawingml/2006/main" xmlns:r="http://schemas.openxmlformats.org/officeDocument/2006/relationships" xmlns:p="http://schemas.openxmlformats.org/presentationml/2006/main">
   <p:cSld name="Slide 15">
-    <p:bg>
-      <p:bgPr>
-        <a:solidFill>
-          <a:srgbClr val="FFFFFF"/>
-        </a:solidFill>
-        <a:effectLst/>
-      </p:bgPr>
-    </p:bg>
     <p:spTree>
       <p:nvGrpSpPr>
         <p:cNvPr id="1" name=""/>
@@ -2838,7 +2850,7 @@
       </p:grpSpPr>
       <p:pic>
         <p:nvPicPr>
-          <p:cNvPr id="2" name="Image 0" descr="/mnt/data/absa_pdf18_render/slide-15.png"/>
+          <p:cNvPr id="2" name="Image 0" descr="/mnt/data/absa_pdf_renders/page-15.png"/>
           <p:cNvPicPr>
             <a:picLocks noChangeAspect="1"/>
           </p:cNvPicPr>
@@ -2871,14 +2883,6 @@
 <file path=ppt/slides/slide16.xml><?xml version="1.0" encoding="utf-8"?>
 <p:sld xmlns:a="http://schemas.openxmlformats.org/drawingml/2006/main" xmlns:r="http://schemas.openxmlformats.org/officeDocument/2006/relationships" xmlns:p="http://schemas.openxmlformats.org/presentationml/2006/main">
   <p:cSld name="Slide 16">
-    <p:bg>
-      <p:bgPr>
-        <a:solidFill>
-          <a:srgbClr val="FFFFFF"/>
-        </a:solidFill>
-        <a:effectLst/>
-      </p:bgPr>
-    </p:bg>
     <p:spTree>
       <p:nvGrpSpPr>
         <p:cNvPr id="1" name=""/>
@@ -2895,7 +2899,7 @@
       </p:grpSpPr>
       <p:pic>
         <p:nvPicPr>
-          <p:cNvPr id="2" name="Image 0" descr="/mnt/data/absa_pdf18_render/slide-16.png"/>
+          <p:cNvPr id="2" name="Image 0" descr="/mnt/data/absa_pdf_renders/page-16.png"/>
           <p:cNvPicPr>
             <a:picLocks noChangeAspect="1"/>
           </p:cNvPicPr>
@@ -2928,14 +2932,6 @@
 <file path=ppt/slides/slide17.xml><?xml version="1.0" encoding="utf-8"?>
 <p:sld xmlns:a="http://schemas.openxmlformats.org/drawingml/2006/main" xmlns:r="http://schemas.openxmlformats.org/officeDocument/2006/relationships" xmlns:p="http://schemas.openxmlformats.org/presentationml/2006/main">
   <p:cSld name="Slide 17">
-    <p:bg>
-      <p:bgPr>
-        <a:solidFill>
-          <a:srgbClr val="FFFFFF"/>
-        </a:solidFill>
-        <a:effectLst/>
-      </p:bgPr>
-    </p:bg>
     <p:spTree>
       <p:nvGrpSpPr>
         <p:cNvPr id="1" name=""/>
@@ -2952,7 +2948,7 @@
       </p:grpSpPr>
       <p:pic>
         <p:nvPicPr>
-          <p:cNvPr id="2" name="Image 0" descr="/mnt/data/absa_pdf18_render/slide-17.png"/>
+          <p:cNvPr id="2" name="Image 0" descr="/mnt/data/absa_pdf_renders/page-17.png"/>
           <p:cNvPicPr>
             <a:picLocks noChangeAspect="1"/>
           </p:cNvPicPr>
@@ -2985,14 +2981,6 @@
 <file path=ppt/slides/slide18.xml><?xml version="1.0" encoding="utf-8"?>
 <p:sld xmlns:a="http://schemas.openxmlformats.org/drawingml/2006/main" xmlns:r="http://schemas.openxmlformats.org/officeDocument/2006/relationships" xmlns:p="http://schemas.openxmlformats.org/presentationml/2006/main">
   <p:cSld name="Slide 18">
-    <p:bg>
-      <p:bgPr>
-        <a:solidFill>
-          <a:srgbClr val="FFFFFF"/>
-        </a:solidFill>
-        <a:effectLst/>
-      </p:bgPr>
-    </p:bg>
     <p:spTree>
       <p:nvGrpSpPr>
         <p:cNvPr id="1" name=""/>
@@ -3009,7 +2997,7 @@
       </p:grpSpPr>
       <p:pic>
         <p:nvPicPr>
-          <p:cNvPr id="2" name="Image 0" descr="/mnt/data/absa_pdf18_render/slide-18.png"/>
+          <p:cNvPr id="2" name="Image 0" descr="/mnt/data/absa_pdf_renders/page-18.png"/>
           <p:cNvPicPr>
             <a:picLocks noChangeAspect="1"/>
           </p:cNvPicPr>
@@ -3039,17 +3027,9 @@
 </p:sld>
 </file>
 
-<file path=ppt/slides/slide2.xml><?xml version="1.0" encoding="utf-8"?>
+<file path=ppt/slides/slide19.xml><?xml version="1.0" encoding="utf-8"?>
 <p:sld xmlns:a="http://schemas.openxmlformats.org/drawingml/2006/main" xmlns:r="http://schemas.openxmlformats.org/officeDocument/2006/relationships" xmlns:p="http://schemas.openxmlformats.org/presentationml/2006/main">
-  <p:cSld name="Slide 2">
-    <p:bg>
-      <p:bgPr>
-        <a:solidFill>
-          <a:srgbClr val="FFFFFF"/>
-        </a:solidFill>
-        <a:effectLst/>
-      </p:bgPr>
-    </p:bg>
+  <p:cSld name="Slide 19">
     <p:spTree>
       <p:nvGrpSpPr>
         <p:cNvPr id="1" name=""/>
@@ -3066,7 +3046,7 @@
       </p:grpSpPr>
       <p:pic>
         <p:nvPicPr>
-          <p:cNvPr id="2" name="Image 0" descr="/mnt/data/absa_pdf18_render/slide-02.png"/>
+          <p:cNvPr id="2" name="Image 0" descr="/mnt/data/absa_pdf_renders/page-19.png"/>
           <p:cNvPicPr>
             <a:picLocks noChangeAspect="1"/>
           </p:cNvPicPr>
@@ -3096,17 +3076,9 @@
 </p:sld>
 </file>
 
-<file path=ppt/slides/slide3.xml><?xml version="1.0" encoding="utf-8"?>
+<file path=ppt/slides/slide2.xml><?xml version="1.0" encoding="utf-8"?>
 <p:sld xmlns:a="http://schemas.openxmlformats.org/drawingml/2006/main" xmlns:r="http://schemas.openxmlformats.org/officeDocument/2006/relationships" xmlns:p="http://schemas.openxmlformats.org/presentationml/2006/main">
-  <p:cSld name="Slide 3">
-    <p:bg>
-      <p:bgPr>
-        <a:solidFill>
-          <a:srgbClr val="FFFFFF"/>
-        </a:solidFill>
-        <a:effectLst/>
-      </p:bgPr>
-    </p:bg>
+  <p:cSld name="Slide 2">
     <p:spTree>
       <p:nvGrpSpPr>
         <p:cNvPr id="1" name=""/>
@@ -3123,7 +3095,7 @@
       </p:grpSpPr>
       <p:pic>
         <p:nvPicPr>
-          <p:cNvPr id="2" name="Image 0" descr="/mnt/data/absa_pdf18_render/slide-03.png"/>
+          <p:cNvPr id="2" name="Image 0" descr="/mnt/data/absa_pdf_renders/page-02.png"/>
           <p:cNvPicPr>
             <a:picLocks noChangeAspect="1"/>
           </p:cNvPicPr>
@@ -3153,17 +3125,9 @@
 </p:sld>
 </file>
 
-<file path=ppt/slides/slide4.xml><?xml version="1.0" encoding="utf-8"?>
+<file path=ppt/slides/slide20.xml><?xml version="1.0" encoding="utf-8"?>
 <p:sld xmlns:a="http://schemas.openxmlformats.org/drawingml/2006/main" xmlns:r="http://schemas.openxmlformats.org/officeDocument/2006/relationships" xmlns:p="http://schemas.openxmlformats.org/presentationml/2006/main">
-  <p:cSld name="Slide 4">
-    <p:bg>
-      <p:bgPr>
-        <a:solidFill>
-          <a:srgbClr val="FFFFFF"/>
-        </a:solidFill>
-        <a:effectLst/>
-      </p:bgPr>
-    </p:bg>
+  <p:cSld name="Slide 20">
     <p:spTree>
       <p:nvGrpSpPr>
         <p:cNvPr id="1" name=""/>
@@ -3180,7 +3144,7 @@
       </p:grpSpPr>
       <p:pic>
         <p:nvPicPr>
-          <p:cNvPr id="2" name="Image 0" descr="/mnt/data/absa_pdf18_render/slide-04.png"/>
+          <p:cNvPr id="2" name="Image 0" descr="/mnt/data/absa_pdf_renders/page-20.png"/>
           <p:cNvPicPr>
             <a:picLocks noChangeAspect="1"/>
           </p:cNvPicPr>
@@ -3194,7 +3158,252 @@
         </p:blipFill>
         <p:spPr>
           <a:xfrm>
-            <a:off x="0" y="67733"/>
+            <a:off x="0" y="0"/>
+            <a:ext cx="9144000" cy="6858000"/>
+          </a:xfrm>
+          <a:prstGeom prst="rect">
+            <a:avLst/>
+          </a:prstGeom>
+        </p:spPr>
+      </p:pic>
+    </p:spTree>
+  </p:cSld>
+  <p:clrMapOvr>
+    <a:masterClrMapping/>
+  </p:clrMapOvr>
+</p:sld>
+</file>
+
+<file path=ppt/slides/slide21.xml><?xml version="1.0" encoding="utf-8"?>
+<p:sld xmlns:a="http://schemas.openxmlformats.org/drawingml/2006/main" xmlns:r="http://schemas.openxmlformats.org/officeDocument/2006/relationships" xmlns:p="http://schemas.openxmlformats.org/presentationml/2006/main">
+  <p:cSld name="Slide 21">
+    <p:spTree>
+      <p:nvGrpSpPr>
+        <p:cNvPr id="1" name=""/>
+        <p:cNvGrpSpPr/>
+        <p:nvPr/>
+      </p:nvGrpSpPr>
+      <p:grpSpPr>
+        <a:xfrm>
+          <a:off x="0" y="0"/>
+          <a:ext cx="0" cy="0"/>
+          <a:chOff x="0" y="0"/>
+          <a:chExt cx="0" cy="0"/>
+        </a:xfrm>
+      </p:grpSpPr>
+      <p:pic>
+        <p:nvPicPr>
+          <p:cNvPr id="2" name="Image 0" descr="/mnt/data/absa_pdf_renders/page-21.png"/>
+          <p:cNvPicPr>
+            <a:picLocks noChangeAspect="1"/>
+          </p:cNvPicPr>
+          <p:nvPr/>
+        </p:nvPicPr>
+        <p:blipFill>
+          <a:blip r:embed="rId3"/>
+          <a:stretch>
+            <a:fillRect/>
+          </a:stretch>
+        </p:blipFill>
+        <p:spPr>
+          <a:xfrm>
+            <a:off x="0" y="0"/>
+            <a:ext cx="9144000" cy="6858000"/>
+          </a:xfrm>
+          <a:prstGeom prst="rect">
+            <a:avLst/>
+          </a:prstGeom>
+        </p:spPr>
+      </p:pic>
+    </p:spTree>
+  </p:cSld>
+  <p:clrMapOvr>
+    <a:masterClrMapping/>
+  </p:clrMapOvr>
+</p:sld>
+</file>
+
+<file path=ppt/slides/slide22.xml><?xml version="1.0" encoding="utf-8"?>
+<p:sld xmlns:a="http://schemas.openxmlformats.org/drawingml/2006/main" xmlns:r="http://schemas.openxmlformats.org/officeDocument/2006/relationships" xmlns:p="http://schemas.openxmlformats.org/presentationml/2006/main">
+  <p:cSld name="Slide 22">
+    <p:spTree>
+      <p:nvGrpSpPr>
+        <p:cNvPr id="1" name=""/>
+        <p:cNvGrpSpPr/>
+        <p:nvPr/>
+      </p:nvGrpSpPr>
+      <p:grpSpPr>
+        <a:xfrm>
+          <a:off x="0" y="0"/>
+          <a:ext cx="0" cy="0"/>
+          <a:chOff x="0" y="0"/>
+          <a:chExt cx="0" cy="0"/>
+        </a:xfrm>
+      </p:grpSpPr>
+      <p:pic>
+        <p:nvPicPr>
+          <p:cNvPr id="2" name="Image 0" descr="/mnt/data/absa_pdf_renders/page-22.png"/>
+          <p:cNvPicPr>
+            <a:picLocks noChangeAspect="1"/>
+          </p:cNvPicPr>
+          <p:nvPr/>
+        </p:nvPicPr>
+        <p:blipFill>
+          <a:blip r:embed="rId3"/>
+          <a:stretch>
+            <a:fillRect/>
+          </a:stretch>
+        </p:blipFill>
+        <p:spPr>
+          <a:xfrm>
+            <a:off x="0" y="0"/>
+            <a:ext cx="9144000" cy="6858000"/>
+          </a:xfrm>
+          <a:prstGeom prst="rect">
+            <a:avLst/>
+          </a:prstGeom>
+        </p:spPr>
+      </p:pic>
+    </p:spTree>
+  </p:cSld>
+  <p:clrMapOvr>
+    <a:masterClrMapping/>
+  </p:clrMapOvr>
+</p:sld>
+</file>
+
+<file path=ppt/slides/slide23.xml><?xml version="1.0" encoding="utf-8"?>
+<p:sld xmlns:a="http://schemas.openxmlformats.org/drawingml/2006/main" xmlns:r="http://schemas.openxmlformats.org/officeDocument/2006/relationships" xmlns:p="http://schemas.openxmlformats.org/presentationml/2006/main">
+  <p:cSld name="Slide 23">
+    <p:spTree>
+      <p:nvGrpSpPr>
+        <p:cNvPr id="1" name=""/>
+        <p:cNvGrpSpPr/>
+        <p:nvPr/>
+      </p:nvGrpSpPr>
+      <p:grpSpPr>
+        <a:xfrm>
+          <a:off x="0" y="0"/>
+          <a:ext cx="0" cy="0"/>
+          <a:chOff x="0" y="0"/>
+          <a:chExt cx="0" cy="0"/>
+        </a:xfrm>
+      </p:grpSpPr>
+      <p:pic>
+        <p:nvPicPr>
+          <p:cNvPr id="2" name="Image 0" descr="/mnt/data/absa_pdf_renders/page-23.png"/>
+          <p:cNvPicPr>
+            <a:picLocks noChangeAspect="1"/>
+          </p:cNvPicPr>
+          <p:nvPr/>
+        </p:nvPicPr>
+        <p:blipFill>
+          <a:blip r:embed="rId3"/>
+          <a:stretch>
+            <a:fillRect/>
+          </a:stretch>
+        </p:blipFill>
+        <p:spPr>
+          <a:xfrm>
+            <a:off x="0" y="0"/>
+            <a:ext cx="9144000" cy="6858000"/>
+          </a:xfrm>
+          <a:prstGeom prst="rect">
+            <a:avLst/>
+          </a:prstGeom>
+        </p:spPr>
+      </p:pic>
+    </p:spTree>
+  </p:cSld>
+  <p:clrMapOvr>
+    <a:masterClrMapping/>
+  </p:clrMapOvr>
+</p:sld>
+</file>
+
+<file path=ppt/slides/slide3.xml><?xml version="1.0" encoding="utf-8"?>
+<p:sld xmlns:a="http://schemas.openxmlformats.org/drawingml/2006/main" xmlns:r="http://schemas.openxmlformats.org/officeDocument/2006/relationships" xmlns:p="http://schemas.openxmlformats.org/presentationml/2006/main">
+  <p:cSld name="Slide 3">
+    <p:spTree>
+      <p:nvGrpSpPr>
+        <p:cNvPr id="1" name=""/>
+        <p:cNvGrpSpPr/>
+        <p:nvPr/>
+      </p:nvGrpSpPr>
+      <p:grpSpPr>
+        <a:xfrm>
+          <a:off x="0" y="0"/>
+          <a:ext cx="0" cy="0"/>
+          <a:chOff x="0" y="0"/>
+          <a:chExt cx="0" cy="0"/>
+        </a:xfrm>
+      </p:grpSpPr>
+      <p:pic>
+        <p:nvPicPr>
+          <p:cNvPr id="2" name="Image 0" descr="/mnt/data/absa_pdf_renders/page-03.png"/>
+          <p:cNvPicPr>
+            <a:picLocks noChangeAspect="1"/>
+          </p:cNvPicPr>
+          <p:nvPr/>
+        </p:nvPicPr>
+        <p:blipFill>
+          <a:blip r:embed="rId3"/>
+          <a:stretch>
+            <a:fillRect/>
+          </a:stretch>
+        </p:blipFill>
+        <p:spPr>
+          <a:xfrm>
+            <a:off x="0" y="0"/>
+            <a:ext cx="9144000" cy="6858000"/>
+          </a:xfrm>
+          <a:prstGeom prst="rect">
+            <a:avLst/>
+          </a:prstGeom>
+        </p:spPr>
+      </p:pic>
+    </p:spTree>
+  </p:cSld>
+  <p:clrMapOvr>
+    <a:masterClrMapping/>
+  </p:clrMapOvr>
+</p:sld>
+</file>
+
+<file path=ppt/slides/slide4.xml><?xml version="1.0" encoding="utf-8"?>
+<p:sld xmlns:a="http://schemas.openxmlformats.org/drawingml/2006/main" xmlns:r="http://schemas.openxmlformats.org/officeDocument/2006/relationships" xmlns:p="http://schemas.openxmlformats.org/presentationml/2006/main">
+  <p:cSld name="Slide 4">
+    <p:spTree>
+      <p:nvGrpSpPr>
+        <p:cNvPr id="1" name=""/>
+        <p:cNvGrpSpPr/>
+        <p:nvPr/>
+      </p:nvGrpSpPr>
+      <p:grpSpPr>
+        <a:xfrm>
+          <a:off x="0" y="0"/>
+          <a:ext cx="0" cy="0"/>
+          <a:chOff x="0" y="0"/>
+          <a:chExt cx="0" cy="0"/>
+        </a:xfrm>
+      </p:grpSpPr>
+      <p:pic>
+        <p:nvPicPr>
+          <p:cNvPr id="2" name="Image 0" descr="/mnt/data/absa_pdf_renders/page-04.png"/>
+          <p:cNvPicPr>
+            <a:picLocks noChangeAspect="1"/>
+          </p:cNvPicPr>
+          <p:nvPr/>
+        </p:nvPicPr>
+        <p:blipFill>
+          <a:blip r:embed="rId3"/>
+          <a:stretch>
+            <a:fillRect/>
+          </a:stretch>
+        </p:blipFill>
+        <p:spPr>
+          <a:xfrm>
+            <a:off x="0" y="0"/>
             <a:ext cx="9144000" cy="6858000"/>
           </a:xfrm>
           <a:prstGeom prst="rect">
@@ -3204,10 +3413,10 @@
       </p:pic>
       <p:pic>
         <p:nvPicPr>
-          <p:cNvPr id="4" name="Picture 3">
+          <p:cNvPr id="3" name="Picture 2">
             <a:extLst>
               <a:ext uri="{FF2B5EF4-FFF2-40B4-BE49-F238E27FC236}">
-                <a16:creationId xmlns:a16="http://schemas.microsoft.com/office/drawing/2014/main" id="{D4622164-4DC7-050B-5A30-EC4B8E795FDC}"/>
+                <a16:creationId xmlns:a16="http://schemas.microsoft.com/office/drawing/2014/main" id="{58815695-6CD6-41E8-1DAF-F65DDE3CFE82}"/>
               </a:ext>
             </a:extLst>
           </p:cNvPr>
@@ -3234,10 +3443,10 @@
       </p:pic>
       <p:pic>
         <p:nvPicPr>
-          <p:cNvPr id="6" name="Picture 5">
+          <p:cNvPr id="4" name="Picture 3">
             <a:extLst>
               <a:ext uri="{FF2B5EF4-FFF2-40B4-BE49-F238E27FC236}">
-                <a16:creationId xmlns:a16="http://schemas.microsoft.com/office/drawing/2014/main" id="{BBFCDDF6-03CA-E0EA-2A98-867CF250B962}"/>
+                <a16:creationId xmlns:a16="http://schemas.microsoft.com/office/drawing/2014/main" id="{995F3017-1BD0-83F3-7A24-E6EF0922AE7E}"/>
               </a:ext>
             </a:extLst>
           </p:cNvPr>
@@ -3273,14 +3482,6 @@
 <file path=ppt/slides/slide5.xml><?xml version="1.0" encoding="utf-8"?>
 <p:sld xmlns:a="http://schemas.openxmlformats.org/drawingml/2006/main" xmlns:r="http://schemas.openxmlformats.org/officeDocument/2006/relationships" xmlns:p="http://schemas.openxmlformats.org/presentationml/2006/main">
   <p:cSld name="Slide 5">
-    <p:bg>
-      <p:bgPr>
-        <a:solidFill>
-          <a:srgbClr val="FFFFFF"/>
-        </a:solidFill>
-        <a:effectLst/>
-      </p:bgPr>
-    </p:bg>
     <p:spTree>
       <p:nvGrpSpPr>
         <p:cNvPr id="1" name=""/>
@@ -3297,7 +3498,7 @@
       </p:grpSpPr>
       <p:pic>
         <p:nvPicPr>
-          <p:cNvPr id="2" name="Image 0" descr="/mnt/data/absa_pdf18_render/slide-05.png"/>
+          <p:cNvPr id="2" name="Image 0" descr="/mnt/data/absa_pdf_renders/page-05.png"/>
           <p:cNvPicPr>
             <a:picLocks noChangeAspect="1"/>
           </p:cNvPicPr>
@@ -3330,14 +3531,6 @@
 <file path=ppt/slides/slide6.xml><?xml version="1.0" encoding="utf-8"?>
 <p:sld xmlns:a="http://schemas.openxmlformats.org/drawingml/2006/main" xmlns:r="http://schemas.openxmlformats.org/officeDocument/2006/relationships" xmlns:p="http://schemas.openxmlformats.org/presentationml/2006/main">
   <p:cSld name="Slide 6">
-    <p:bg>
-      <p:bgPr>
-        <a:solidFill>
-          <a:srgbClr val="FFFFFF"/>
-        </a:solidFill>
-        <a:effectLst/>
-      </p:bgPr>
-    </p:bg>
     <p:spTree>
       <p:nvGrpSpPr>
         <p:cNvPr id="1" name=""/>
@@ -3354,7 +3547,7 @@
       </p:grpSpPr>
       <p:pic>
         <p:nvPicPr>
-          <p:cNvPr id="2" name="Image 0" descr="/mnt/data/absa_pdf18_render/slide-06.png"/>
+          <p:cNvPr id="2" name="Image 0" descr="/mnt/data/absa_pdf_renders/page-06.png"/>
           <p:cNvPicPr>
             <a:picLocks noChangeAspect="1"/>
           </p:cNvPicPr>
@@ -3387,14 +3580,6 @@
 <file path=ppt/slides/slide7.xml><?xml version="1.0" encoding="utf-8"?>
 <p:sld xmlns:a="http://schemas.openxmlformats.org/drawingml/2006/main" xmlns:r="http://schemas.openxmlformats.org/officeDocument/2006/relationships" xmlns:p="http://schemas.openxmlformats.org/presentationml/2006/main">
   <p:cSld name="Slide 7">
-    <p:bg>
-      <p:bgPr>
-        <a:solidFill>
-          <a:srgbClr val="FFFFFF"/>
-        </a:solidFill>
-        <a:effectLst/>
-      </p:bgPr>
-    </p:bg>
     <p:spTree>
       <p:nvGrpSpPr>
         <p:cNvPr id="1" name=""/>
@@ -3411,7 +3596,7 @@
       </p:grpSpPr>
       <p:pic>
         <p:nvPicPr>
-          <p:cNvPr id="2" name="Image 0" descr="/mnt/data/absa_pdf18_render/slide-07.png"/>
+          <p:cNvPr id="2" name="Image 0" descr="/mnt/data/absa_pdf_renders/page-07.png"/>
           <p:cNvPicPr>
             <a:picLocks noChangeAspect="1"/>
           </p:cNvPicPr>
@@ -3438,7 +3623,7 @@
           <p:cNvPr id="3" name="Picture 2">
             <a:extLst>
               <a:ext uri="{FF2B5EF4-FFF2-40B4-BE49-F238E27FC236}">
-                <a16:creationId xmlns:a16="http://schemas.microsoft.com/office/drawing/2014/main" id="{272F16B9-B7C4-3308-1B54-88804978A7CC}"/>
+                <a16:creationId xmlns:a16="http://schemas.microsoft.com/office/drawing/2014/main" id="{9255A6A9-0309-264F-AB6C-E74B7AB148E9}"/>
               </a:ext>
             </a:extLst>
           </p:cNvPr>
@@ -3469,567 +3654,6 @@
           </a:prstGeom>
         </p:spPr>
       </p:pic>
-      <mc:AlternateContent xmlns:mc="http://schemas.openxmlformats.org/markup-compatibility/2006">
-        <mc:Choice xmlns:p14="http://schemas.microsoft.com/office/powerpoint/2010/main" Requires="p14">
-          <p:contentPart p14:bwMode="auto" r:id="rId5">
-            <p14:nvContentPartPr>
-              <p14:cNvPr id="4" name="Ink 3">
-                <a:extLst>
-                  <a:ext uri="{FF2B5EF4-FFF2-40B4-BE49-F238E27FC236}">
-                    <a16:creationId xmlns:a16="http://schemas.microsoft.com/office/drawing/2014/main" id="{70CFA882-B878-F9D0-4B08-5D55E4E1AF7D}"/>
-                  </a:ext>
-                </a:extLst>
-              </p14:cNvPr>
-              <p14:cNvContentPartPr/>
-              <p14:nvPr/>
-            </p14:nvContentPartPr>
-            <p14:xfrm>
-              <a:off x="4484413" y="1862347"/>
-              <a:ext cx="854280" cy="108720"/>
-            </p14:xfrm>
-          </p:contentPart>
-        </mc:Choice>
-        <mc:Fallback>
-          <p:pic>
-            <p:nvPicPr>
-              <p:cNvPr id="4" name="Ink 3">
-                <a:extLst>
-                  <a:ext uri="{FF2B5EF4-FFF2-40B4-BE49-F238E27FC236}">
-                    <a16:creationId xmlns:a16="http://schemas.microsoft.com/office/drawing/2014/main" id="{70CFA882-B878-F9D0-4B08-5D55E4E1AF7D}"/>
-                  </a:ext>
-                </a:extLst>
-              </p:cNvPr>
-              <p:cNvPicPr/>
-              <p:nvPr/>
-            </p:nvPicPr>
-            <p:blipFill>
-              <a:blip r:embed="rId6"/>
-              <a:stretch>
-                <a:fillRect/>
-              </a:stretch>
-            </p:blipFill>
-            <p:spPr>
-              <a:xfrm>
-                <a:off x="4430413" y="1754707"/>
-                <a:ext cx="961920" cy="324360"/>
-              </a:xfrm>
-              <a:prstGeom prst="rect">
-                <a:avLst/>
-              </a:prstGeom>
-            </p:spPr>
-          </p:pic>
-        </mc:Fallback>
-      </mc:AlternateContent>
-      <mc:AlternateContent xmlns:mc="http://schemas.openxmlformats.org/markup-compatibility/2006">
-        <mc:Choice xmlns:p14="http://schemas.microsoft.com/office/powerpoint/2010/main" Requires="p14">
-          <p:contentPart p14:bwMode="auto" r:id="rId7">
-            <p14:nvContentPartPr>
-              <p14:cNvPr id="5" name="Ink 4">
-                <a:extLst>
-                  <a:ext uri="{FF2B5EF4-FFF2-40B4-BE49-F238E27FC236}">
-                    <a16:creationId xmlns:a16="http://schemas.microsoft.com/office/drawing/2014/main" id="{EA61EFA6-075D-A857-DDEE-FD6608C82458}"/>
-                  </a:ext>
-                </a:extLst>
-              </p14:cNvPr>
-              <p14:cNvContentPartPr/>
-              <p14:nvPr/>
-            </p14:nvContentPartPr>
-            <p14:xfrm>
-              <a:off x="4622653" y="1869187"/>
-              <a:ext cx="1074240" cy="95400"/>
-            </p14:xfrm>
-          </p:contentPart>
-        </mc:Choice>
-        <mc:Fallback>
-          <p:pic>
-            <p:nvPicPr>
-              <p:cNvPr id="5" name="Ink 4">
-                <a:extLst>
-                  <a:ext uri="{FF2B5EF4-FFF2-40B4-BE49-F238E27FC236}">
-                    <a16:creationId xmlns:a16="http://schemas.microsoft.com/office/drawing/2014/main" id="{EA61EFA6-075D-A857-DDEE-FD6608C82458}"/>
-                  </a:ext>
-                </a:extLst>
-              </p:cNvPr>
-              <p:cNvPicPr/>
-              <p:nvPr/>
-            </p:nvPicPr>
-            <p:blipFill>
-              <a:blip r:embed="rId8"/>
-              <a:stretch>
-                <a:fillRect/>
-              </a:stretch>
-            </p:blipFill>
-            <p:spPr>
-              <a:xfrm>
-                <a:off x="4569013" y="1761187"/>
-                <a:ext cx="1181880" cy="311040"/>
-              </a:xfrm>
-              <a:prstGeom prst="rect">
-                <a:avLst/>
-              </a:prstGeom>
-            </p:spPr>
-          </p:pic>
-        </mc:Fallback>
-      </mc:AlternateContent>
-      <mc:AlternateContent xmlns:mc="http://schemas.openxmlformats.org/markup-compatibility/2006">
-        <mc:Choice xmlns:p14="http://schemas.microsoft.com/office/powerpoint/2010/main" Requires="p14">
-          <p:contentPart p14:bwMode="auto" r:id="rId9">
-            <p14:nvContentPartPr>
-              <p14:cNvPr id="6" name="Ink 5">
-                <a:extLst>
-                  <a:ext uri="{FF2B5EF4-FFF2-40B4-BE49-F238E27FC236}">
-                    <a16:creationId xmlns:a16="http://schemas.microsoft.com/office/drawing/2014/main" id="{21F92DCA-82AF-3C42-B504-37430E71357B}"/>
-                  </a:ext>
-                </a:extLst>
-              </p14:cNvPr>
-              <p14:cNvContentPartPr/>
-              <p14:nvPr/>
-            </p14:nvContentPartPr>
-            <p14:xfrm>
-              <a:off x="4927213" y="1904827"/>
-              <a:ext cx="63720" cy="150120"/>
-            </p14:xfrm>
-          </p:contentPart>
-        </mc:Choice>
-        <mc:Fallback>
-          <p:pic>
-            <p:nvPicPr>
-              <p:cNvPr id="6" name="Ink 5">
-                <a:extLst>
-                  <a:ext uri="{FF2B5EF4-FFF2-40B4-BE49-F238E27FC236}">
-                    <a16:creationId xmlns:a16="http://schemas.microsoft.com/office/drawing/2014/main" id="{21F92DCA-82AF-3C42-B504-37430E71357B}"/>
-                  </a:ext>
-                </a:extLst>
-              </p:cNvPr>
-              <p:cNvPicPr/>
-              <p:nvPr/>
-            </p:nvPicPr>
-            <p:blipFill>
-              <a:blip r:embed="rId10"/>
-              <a:stretch>
-                <a:fillRect/>
-              </a:stretch>
-            </p:blipFill>
-            <p:spPr>
-              <a:xfrm>
-                <a:off x="4873573" y="1797187"/>
-                <a:ext cx="171360" cy="365760"/>
-              </a:xfrm>
-              <a:prstGeom prst="rect">
-                <a:avLst/>
-              </a:prstGeom>
-            </p:spPr>
-          </p:pic>
-        </mc:Fallback>
-      </mc:AlternateContent>
-      <mc:AlternateContent xmlns:mc="http://schemas.openxmlformats.org/markup-compatibility/2006">
-        <mc:Choice xmlns:p14="http://schemas.microsoft.com/office/powerpoint/2010/main" Requires="p14">
-          <p:contentPart p14:bwMode="auto" r:id="rId11">
-            <p14:nvContentPartPr>
-              <p14:cNvPr id="7" name="Ink 6">
-                <a:extLst>
-                  <a:ext uri="{FF2B5EF4-FFF2-40B4-BE49-F238E27FC236}">
-                    <a16:creationId xmlns:a16="http://schemas.microsoft.com/office/drawing/2014/main" id="{590D333F-6BDD-280D-E052-62C893F506EA}"/>
-                  </a:ext>
-                </a:extLst>
-              </p14:cNvPr>
-              <p14:cNvContentPartPr/>
-              <p14:nvPr/>
-            </p14:nvContentPartPr>
-            <p14:xfrm>
-              <a:off x="4605733" y="1989427"/>
-              <a:ext cx="1066320" cy="9360"/>
-            </p14:xfrm>
-          </p:contentPart>
-        </mc:Choice>
-        <mc:Fallback>
-          <p:pic>
-            <p:nvPicPr>
-              <p:cNvPr id="7" name="Ink 6">
-                <a:extLst>
-                  <a:ext uri="{FF2B5EF4-FFF2-40B4-BE49-F238E27FC236}">
-                    <a16:creationId xmlns:a16="http://schemas.microsoft.com/office/drawing/2014/main" id="{590D333F-6BDD-280D-E052-62C893F506EA}"/>
-                  </a:ext>
-                </a:extLst>
-              </p:cNvPr>
-              <p:cNvPicPr/>
-              <p:nvPr/>
-            </p:nvPicPr>
-            <p:blipFill>
-              <a:blip r:embed="rId12"/>
-              <a:stretch>
-                <a:fillRect/>
-              </a:stretch>
-            </p:blipFill>
-            <p:spPr>
-              <a:xfrm>
-                <a:off x="4552093" y="1881787"/>
-                <a:ext cx="1173960" cy="225000"/>
-              </a:xfrm>
-              <a:prstGeom prst="rect">
-                <a:avLst/>
-              </a:prstGeom>
-            </p:spPr>
-          </p:pic>
-        </mc:Fallback>
-      </mc:AlternateContent>
-      <mc:AlternateContent xmlns:mc="http://schemas.openxmlformats.org/markup-compatibility/2006">
-        <mc:Choice xmlns:p14="http://schemas.microsoft.com/office/powerpoint/2010/main" Requires="p14">
-          <p:contentPart p14:bwMode="auto" r:id="rId13">
-            <p14:nvContentPartPr>
-              <p14:cNvPr id="8" name="Ink 7">
-                <a:extLst>
-                  <a:ext uri="{FF2B5EF4-FFF2-40B4-BE49-F238E27FC236}">
-                    <a16:creationId xmlns:a16="http://schemas.microsoft.com/office/drawing/2014/main" id="{A9FB1D13-589E-1ED8-12D4-00012A450C2C}"/>
-                  </a:ext>
-                </a:extLst>
-              </p14:cNvPr>
-              <p14:cNvContentPartPr/>
-              <p14:nvPr/>
-            </p14:nvContentPartPr>
-            <p14:xfrm>
-              <a:off x="4635973" y="1870987"/>
-              <a:ext cx="393480" cy="305280"/>
-            </p14:xfrm>
-          </p:contentPart>
-        </mc:Choice>
-        <mc:Fallback>
-          <p:pic>
-            <p:nvPicPr>
-              <p:cNvPr id="8" name="Ink 7">
-                <a:extLst>
-                  <a:ext uri="{FF2B5EF4-FFF2-40B4-BE49-F238E27FC236}">
-                    <a16:creationId xmlns:a16="http://schemas.microsoft.com/office/drawing/2014/main" id="{A9FB1D13-589E-1ED8-12D4-00012A450C2C}"/>
-                  </a:ext>
-                </a:extLst>
-              </p:cNvPr>
-              <p:cNvPicPr/>
-              <p:nvPr/>
-            </p:nvPicPr>
-            <p:blipFill>
-              <a:blip r:embed="rId14"/>
-              <a:stretch>
-                <a:fillRect/>
-              </a:stretch>
-            </p:blipFill>
-            <p:spPr>
-              <a:xfrm>
-                <a:off x="4581973" y="1763347"/>
-                <a:ext cx="501120" cy="520920"/>
-              </a:xfrm>
-              <a:prstGeom prst="rect">
-                <a:avLst/>
-              </a:prstGeom>
-            </p:spPr>
-          </p:pic>
-        </mc:Fallback>
-      </mc:AlternateContent>
-      <mc:AlternateContent xmlns:mc="http://schemas.openxmlformats.org/markup-compatibility/2006">
-        <mc:Choice xmlns:p14="http://schemas.microsoft.com/office/powerpoint/2010/main" Requires="p14">
-          <p:contentPart p14:bwMode="auto" r:id="rId15">
-            <p14:nvContentPartPr>
-              <p14:cNvPr id="9" name="Ink 8">
-                <a:extLst>
-                  <a:ext uri="{FF2B5EF4-FFF2-40B4-BE49-F238E27FC236}">
-                    <a16:creationId xmlns:a16="http://schemas.microsoft.com/office/drawing/2014/main" id="{9CAB499B-2B78-7FAF-9E14-DC8984E1C6CC}"/>
-                  </a:ext>
-                </a:extLst>
-              </p14:cNvPr>
-              <p14:cNvContentPartPr/>
-              <p14:nvPr/>
-            </p14:nvContentPartPr>
-            <p14:xfrm>
-              <a:off x="4859893" y="1947307"/>
-              <a:ext cx="3883680" cy="157320"/>
-            </p14:xfrm>
-          </p:contentPart>
-        </mc:Choice>
-        <mc:Fallback>
-          <p:pic>
-            <p:nvPicPr>
-              <p:cNvPr id="9" name="Ink 8">
-                <a:extLst>
-                  <a:ext uri="{FF2B5EF4-FFF2-40B4-BE49-F238E27FC236}">
-                    <a16:creationId xmlns:a16="http://schemas.microsoft.com/office/drawing/2014/main" id="{9CAB499B-2B78-7FAF-9E14-DC8984E1C6CC}"/>
-                  </a:ext>
-                </a:extLst>
-              </p:cNvPr>
-              <p:cNvPicPr/>
-              <p:nvPr/>
-            </p:nvPicPr>
-            <p:blipFill>
-              <a:blip r:embed="rId16"/>
-              <a:stretch>
-                <a:fillRect/>
-              </a:stretch>
-            </p:blipFill>
-            <p:spPr>
-              <a:xfrm>
-                <a:off x="4805893" y="1839307"/>
-                <a:ext cx="3991320" cy="372960"/>
-              </a:xfrm>
-              <a:prstGeom prst="rect">
-                <a:avLst/>
-              </a:prstGeom>
-            </p:spPr>
-          </p:pic>
-        </mc:Fallback>
-      </mc:AlternateContent>
-      <mc:AlternateContent xmlns:mc="http://schemas.openxmlformats.org/markup-compatibility/2006">
-        <mc:Choice xmlns:p14="http://schemas.microsoft.com/office/powerpoint/2010/main" Requires="p14">
-          <p:contentPart p14:bwMode="auto" r:id="rId17">
-            <p14:nvContentPartPr>
-              <p14:cNvPr id="10" name="Ink 9">
-                <a:extLst>
-                  <a:ext uri="{FF2B5EF4-FFF2-40B4-BE49-F238E27FC236}">
-                    <a16:creationId xmlns:a16="http://schemas.microsoft.com/office/drawing/2014/main" id="{111514F1-EF27-5AE5-8801-8AC94FB6A0ED}"/>
-                  </a:ext>
-                </a:extLst>
-              </p14:cNvPr>
-              <p14:cNvContentPartPr/>
-              <p14:nvPr/>
-            </p14:nvContentPartPr>
-            <p14:xfrm>
-              <a:off x="8915293" y="2548147"/>
-              <a:ext cx="360" cy="360"/>
-            </p14:xfrm>
-          </p:contentPart>
-        </mc:Choice>
-        <mc:Fallback>
-          <p:pic>
-            <p:nvPicPr>
-              <p:cNvPr id="10" name="Ink 9">
-                <a:extLst>
-                  <a:ext uri="{FF2B5EF4-FFF2-40B4-BE49-F238E27FC236}">
-                    <a16:creationId xmlns:a16="http://schemas.microsoft.com/office/drawing/2014/main" id="{111514F1-EF27-5AE5-8801-8AC94FB6A0ED}"/>
-                  </a:ext>
-                </a:extLst>
-              </p:cNvPr>
-              <p:cNvPicPr/>
-              <p:nvPr/>
-            </p:nvPicPr>
-            <p:blipFill>
-              <a:blip r:embed="rId18"/>
-              <a:stretch>
-                <a:fillRect/>
-              </a:stretch>
-            </p:blipFill>
-            <p:spPr>
-              <a:xfrm>
-                <a:off x="8861293" y="2440507"/>
-                <a:ext cx="108000" cy="216000"/>
-              </a:xfrm>
-              <a:prstGeom prst="rect">
-                <a:avLst/>
-              </a:prstGeom>
-            </p:spPr>
-          </p:pic>
-        </mc:Fallback>
-      </mc:AlternateContent>
-      <mc:AlternateContent xmlns:mc="http://schemas.openxmlformats.org/markup-compatibility/2006">
-        <mc:Choice xmlns:p14="http://schemas.microsoft.com/office/powerpoint/2010/main" Requires="p14">
-          <p:contentPart p14:bwMode="auto" r:id="rId19">
-            <p14:nvContentPartPr>
-              <p14:cNvPr id="11" name="Ink 10">
-                <a:extLst>
-                  <a:ext uri="{FF2B5EF4-FFF2-40B4-BE49-F238E27FC236}">
-                    <a16:creationId xmlns:a16="http://schemas.microsoft.com/office/drawing/2014/main" id="{0D7CBA0F-2F3B-12B1-2CE3-20E051237A37}"/>
-                  </a:ext>
-                </a:extLst>
-              </p14:cNvPr>
-              <p14:cNvContentPartPr/>
-              <p14:nvPr/>
-            </p14:nvContentPartPr>
-            <p14:xfrm>
-              <a:off x="8907013" y="2539867"/>
-              <a:ext cx="360" cy="360"/>
-            </p14:xfrm>
-          </p:contentPart>
-        </mc:Choice>
-        <mc:Fallback>
-          <p:pic>
-            <p:nvPicPr>
-              <p:cNvPr id="11" name="Ink 10">
-                <a:extLst>
-                  <a:ext uri="{FF2B5EF4-FFF2-40B4-BE49-F238E27FC236}">
-                    <a16:creationId xmlns:a16="http://schemas.microsoft.com/office/drawing/2014/main" id="{0D7CBA0F-2F3B-12B1-2CE3-20E051237A37}"/>
-                  </a:ext>
-                </a:extLst>
-              </p:cNvPr>
-              <p:cNvPicPr/>
-              <p:nvPr/>
-            </p:nvPicPr>
-            <p:blipFill>
-              <a:blip r:embed="rId18"/>
-              <a:stretch>
-                <a:fillRect/>
-              </a:stretch>
-            </p:blipFill>
-            <p:spPr>
-              <a:xfrm>
-                <a:off x="8853013" y="2431867"/>
-                <a:ext cx="108000" cy="216000"/>
-              </a:xfrm>
-              <a:prstGeom prst="rect">
-                <a:avLst/>
-              </a:prstGeom>
-            </p:spPr>
-          </p:pic>
-        </mc:Fallback>
-      </mc:AlternateContent>
-      <mc:AlternateContent xmlns:mc="http://schemas.openxmlformats.org/markup-compatibility/2006">
-        <mc:Choice xmlns:p14="http://schemas.microsoft.com/office/powerpoint/2010/main" Requires="p14">
-          <p:contentPart p14:bwMode="auto" r:id="rId20">
-            <p14:nvContentPartPr>
-              <p14:cNvPr id="12" name="Ink 11">
-                <a:extLst>
-                  <a:ext uri="{FF2B5EF4-FFF2-40B4-BE49-F238E27FC236}">
-                    <a16:creationId xmlns:a16="http://schemas.microsoft.com/office/drawing/2014/main" id="{AAE9FB2F-A18A-F70B-4E26-D1446C139DD7}"/>
-                  </a:ext>
-                </a:extLst>
-              </p14:cNvPr>
-              <p14:cNvContentPartPr/>
-              <p14:nvPr/>
-            </p14:nvContentPartPr>
-            <p14:xfrm>
-              <a:off x="8886493" y="2480827"/>
-              <a:ext cx="3960" cy="360"/>
-            </p14:xfrm>
-          </p:contentPart>
-        </mc:Choice>
-        <mc:Fallback>
-          <p:pic>
-            <p:nvPicPr>
-              <p:cNvPr id="12" name="Ink 11">
-                <a:extLst>
-                  <a:ext uri="{FF2B5EF4-FFF2-40B4-BE49-F238E27FC236}">
-                    <a16:creationId xmlns:a16="http://schemas.microsoft.com/office/drawing/2014/main" id="{AAE9FB2F-A18A-F70B-4E26-D1446C139DD7}"/>
-                  </a:ext>
-                </a:extLst>
-              </p:cNvPr>
-              <p:cNvPicPr/>
-              <p:nvPr/>
-            </p:nvPicPr>
-            <p:blipFill>
-              <a:blip r:embed="rId18"/>
-              <a:stretch>
-                <a:fillRect/>
-              </a:stretch>
-            </p:blipFill>
-            <p:spPr>
-              <a:xfrm>
-                <a:off x="8832493" y="2372827"/>
-                <a:ext cx="111600" cy="216000"/>
-              </a:xfrm>
-              <a:prstGeom prst="rect">
-                <a:avLst/>
-              </a:prstGeom>
-            </p:spPr>
-          </p:pic>
-        </mc:Fallback>
-      </mc:AlternateContent>
-      <mc:AlternateContent xmlns:mc="http://schemas.openxmlformats.org/markup-compatibility/2006">
-        <mc:Choice xmlns:p14="http://schemas.microsoft.com/office/powerpoint/2010/main" Requires="p14">
-          <p:contentPart p14:bwMode="auto" r:id="rId21">
-            <p14:nvContentPartPr>
-              <p14:cNvPr id="13" name="Ink 12">
-                <a:extLst>
-                  <a:ext uri="{FF2B5EF4-FFF2-40B4-BE49-F238E27FC236}">
-                    <a16:creationId xmlns:a16="http://schemas.microsoft.com/office/drawing/2014/main" id="{4331156E-DF1C-644D-1962-9227C65622ED}"/>
-                  </a:ext>
-                </a:extLst>
-              </p14:cNvPr>
-              <p14:cNvContentPartPr/>
-              <p14:nvPr/>
-            </p14:nvContentPartPr>
-            <p14:xfrm>
-              <a:off x="8881093" y="2480827"/>
-              <a:ext cx="360" cy="360"/>
-            </p14:xfrm>
-          </p:contentPart>
-        </mc:Choice>
-        <mc:Fallback>
-          <p:pic>
-            <p:nvPicPr>
-              <p:cNvPr id="13" name="Ink 12">
-                <a:extLst>
-                  <a:ext uri="{FF2B5EF4-FFF2-40B4-BE49-F238E27FC236}">
-                    <a16:creationId xmlns:a16="http://schemas.microsoft.com/office/drawing/2014/main" id="{4331156E-DF1C-644D-1962-9227C65622ED}"/>
-                  </a:ext>
-                </a:extLst>
-              </p:cNvPr>
-              <p:cNvPicPr/>
-              <p:nvPr/>
-            </p:nvPicPr>
-            <p:blipFill>
-              <a:blip r:embed="rId18"/>
-              <a:stretch>
-                <a:fillRect/>
-              </a:stretch>
-            </p:blipFill>
-            <p:spPr>
-              <a:xfrm>
-                <a:off x="8827453" y="2372827"/>
-                <a:ext cx="108000" cy="216000"/>
-              </a:xfrm>
-              <a:prstGeom prst="rect">
-                <a:avLst/>
-              </a:prstGeom>
-            </p:spPr>
-          </p:pic>
-        </mc:Fallback>
-      </mc:AlternateContent>
-      <mc:AlternateContent xmlns:mc="http://schemas.openxmlformats.org/markup-compatibility/2006">
-        <mc:Choice xmlns:p14="http://schemas.microsoft.com/office/powerpoint/2010/main" Requires="p14">
-          <p:contentPart p14:bwMode="auto" r:id="rId22">
-            <p14:nvContentPartPr>
-              <p14:cNvPr id="14" name="Ink 13">
-                <a:extLst>
-                  <a:ext uri="{FF2B5EF4-FFF2-40B4-BE49-F238E27FC236}">
-                    <a16:creationId xmlns:a16="http://schemas.microsoft.com/office/drawing/2014/main" id="{232EC21C-0211-3493-2BD7-015F91DC4328}"/>
-                  </a:ext>
-                </a:extLst>
-              </p14:cNvPr>
-              <p14:cNvContentPartPr/>
-              <p14:nvPr/>
-            </p14:nvContentPartPr>
-            <p14:xfrm>
-              <a:off x="11302813" y="5469187"/>
-              <a:ext cx="360" cy="360"/>
-            </p14:xfrm>
-          </p:contentPart>
-        </mc:Choice>
-        <mc:Fallback>
-          <p:pic>
-            <p:nvPicPr>
-              <p:cNvPr id="14" name="Ink 13">
-                <a:extLst>
-                  <a:ext uri="{FF2B5EF4-FFF2-40B4-BE49-F238E27FC236}">
-                    <a16:creationId xmlns:a16="http://schemas.microsoft.com/office/drawing/2014/main" id="{232EC21C-0211-3493-2BD7-015F91DC4328}"/>
-                  </a:ext>
-                </a:extLst>
-              </p:cNvPr>
-              <p:cNvPicPr/>
-              <p:nvPr/>
-            </p:nvPicPr>
-            <p:blipFill>
-              <a:blip r:embed="rId18"/>
-              <a:stretch>
-                <a:fillRect/>
-              </a:stretch>
-            </p:blipFill>
-            <p:spPr>
-              <a:xfrm>
-                <a:off x="11248813" y="5361187"/>
-                <a:ext cx="108000" cy="216000"/>
-              </a:xfrm>
-              <a:prstGeom prst="rect">
-                <a:avLst/>
-              </a:prstGeom>
-            </p:spPr>
-          </p:pic>
-        </mc:Fallback>
-      </mc:AlternateContent>
     </p:spTree>
   </p:cSld>
   <p:clrMapOvr>
@@ -4041,14 +3665,6 @@
 <file path=ppt/slides/slide8.xml><?xml version="1.0" encoding="utf-8"?>
 <p:sld xmlns:a="http://schemas.openxmlformats.org/drawingml/2006/main" xmlns:r="http://schemas.openxmlformats.org/officeDocument/2006/relationships" xmlns:p="http://schemas.openxmlformats.org/presentationml/2006/main">
   <p:cSld name="Slide 8">
-    <p:bg>
-      <p:bgPr>
-        <a:solidFill>
-          <a:srgbClr val="FFFFFF"/>
-        </a:solidFill>
-        <a:effectLst/>
-      </p:bgPr>
-    </p:bg>
     <p:spTree>
       <p:nvGrpSpPr>
         <p:cNvPr id="1" name=""/>
@@ -4065,7 +3681,7 @@
       </p:grpSpPr>
       <p:pic>
         <p:nvPicPr>
-          <p:cNvPr id="2" name="Image 0" descr="/mnt/data/absa_pdf18_render/slide-08.png"/>
+          <p:cNvPr id="2" name="Image 0" descr="/mnt/data/absa_pdf_renders/page-08.png"/>
           <p:cNvPicPr>
             <a:picLocks noChangeAspect="1"/>
           </p:cNvPicPr>
@@ -4098,14 +3714,6 @@
 <file path=ppt/slides/slide9.xml><?xml version="1.0" encoding="utf-8"?>
 <p:sld xmlns:a="http://schemas.openxmlformats.org/drawingml/2006/main" xmlns:r="http://schemas.openxmlformats.org/officeDocument/2006/relationships" xmlns:p="http://schemas.openxmlformats.org/presentationml/2006/main">
   <p:cSld name="Slide 9">
-    <p:bg>
-      <p:bgPr>
-        <a:solidFill>
-          <a:srgbClr val="FFFFFF"/>
-        </a:solidFill>
-        <a:effectLst/>
-      </p:bgPr>
-    </p:bg>
     <p:spTree>
       <p:nvGrpSpPr>
         <p:cNvPr id="1" name=""/>
@@ -4122,7 +3730,7 @@
       </p:grpSpPr>
       <p:pic>
         <p:nvPicPr>
-          <p:cNvPr id="2" name="Image 0" descr="/mnt/data/absa_pdf18_render/slide-09.png"/>
+          <p:cNvPr id="2" name="Image 0" descr="/mnt/data/absa_pdf_renders/page-09.png"/>
           <p:cNvPicPr>
             <a:picLocks noChangeAspect="1"/>
           </p:cNvPicPr>
@@ -4195,7 +3803,7 @@
     </a:clrScheme>
     <a:fontScheme name="Office">
       <a:majorFont>
-        <a:latin typeface="Aptos"/>
+        <a:latin typeface="Arial"/>
         <a:ea typeface=""/>
         <a:cs typeface=""/>
         <a:font script="Jpan" typeface="游ゴシック Light"/>
@@ -4247,7 +3855,7 @@
         <a:font script="Tfng" typeface="Ebrima"/>
       </a:majorFont>
       <a:minorFont>
-        <a:latin typeface="Aptos"/>
+        <a:latin typeface="Arial"/>
         <a:ea typeface=""/>
         <a:cs typeface=""/>
         <a:font script="Jpan" typeface="游ゴシック"/>
